--- a/10-Knowledge-Products/KP1-GEA/videos/module_2/en/decks/KP1_M2_2.7_Deck_v0.2.pptx
+++ b/10-Knowledge-Products/KP1-GEA/videos/module_2/en/decks/KP1_M2_2.7_Deck_v0.2.pptx
@@ -14,14 +14,14 @@
     <p:handoutMasterId r:id="rId47"/>
   </p:handoutMasterIdLst>
   <p:sldIdLst>
-    <p:sldId id="2681" r:id="rId8"/>
-    <p:sldId id="2740" r:id="rId62"/>
-    <p:sldId id="2741" r:id="rId63"/>
-    <p:sldId id="2742" r:id="rId64"/>
-    <p:sldId id="2743" r:id="rId65"/>
-    <p:sldId id="2744" r:id="rId66"/>
-    <p:sldId id="2745" r:id="rId67"/>
     <p:sldId id="2746" r:id="rId68"/>
+    <p:sldId id="2747" r:id="rId69"/>
+    <p:sldId id="2748" r:id="rId70"/>
+    <p:sldId id="2749" r:id="rId71"/>
+    <p:sldId id="2750" r:id="rId72"/>
+    <p:sldId id="2751" r:id="rId73"/>
+    <p:sldId id="2752" r:id="rId74"/>
+    <p:sldId id="2753" r:id="rId75"/>
   </p:sldIdLst>
   <p:sldSz cx="12192000" cy="6858000"/>
   <p:notesSz cx="6858000" cy="9144000"/>
@@ -888,7 +888,7 @@
 </p:notesMaster>
 </file>
 
-<file path=ppt/notesSlides/notesSlide21.xml><?xml version="1.0" encoding="utf-8"?>
+<file path=ppt/notesSlides/notesSlide53.xml><?xml version="1.0" encoding="utf-8"?>
 <p:notes xmlns:a="http://schemas.openxmlformats.org/drawingml/2006/main" xmlns:p="http://schemas.openxmlformats.org/presentationml/2006/main" xmlns:r="http://schemas.openxmlformats.org/officeDocument/2006/relationships">
   <p:cSld>
     <p:spTree>
@@ -933,7 +933,7 @@
           <a:lstStyle/>
           <a:p>
             <a:r>
-              <a:t>Title card for standalone video 2.7. Content slides are identical to the corresponding section of the combined deck KP1_M2_Deck_v0.2.pptx; voice-over is in each slide’s notes.</a:t>
+              <a:t>Title card — the cold open. The hosts name the module, the video number, the title and the single message on this slide; no scripted narration. Hold until the opener begins; the opener is narrated on the next slide.</a:t>
             </a:r>
           </a:p>
         </p:txBody>
@@ -958,7 +958,7 @@
 </p:notes>
 </file>
 
-<file path=ppt/notesSlides/notesSlide47.xml><?xml version="1.0" encoding="utf-8"?>
+<file path=ppt/notesSlides/notesSlide54.xml><?xml version="1.0" encoding="utf-8"?>
 <p:notes xmlns:a="http://schemas.openxmlformats.org/drawingml/2006/main" xmlns:p="http://schemas.openxmlformats.org/presentationml/2006/main" xmlns:r="http://schemas.openxmlformats.org/officeDocument/2006/relationships">
   <p:cSld>
     <p:spTree>
@@ -1003,7 +1003,7 @@
           <a:lstStyle/>
           <a:p>
             <a:r>
-              <a:t>VO, slide 1: Two traps catch governments again and again. As the architect at the Assess phase, you are the one positioned to spot them early — before they are built, while they are still a line in a project plan.</a:t>
+              <a:t>VO: Two traps catch governments again and again. As the architect at the Assess phase, you are the one positioned to spot them early — before they are built, while they are still a line in a project plan.</a:t>
             </a:r>
           </a:p>
         </p:txBody>
@@ -1028,7 +1028,7 @@
 </p:notes>
 </file>
 
-<file path=ppt/notesSlides/notesSlide48.xml><?xml version="1.0" encoding="utf-8"?>
+<file path=ppt/notesSlides/notesSlide55.xml><?xml version="1.0" encoding="utf-8"?>
 <p:notes xmlns:a="http://schemas.openxmlformats.org/drawingml/2006/main" xmlns:p="http://schemas.openxmlformats.org/presentationml/2006/main" xmlns:r="http://schemas.openxmlformats.org/officeDocument/2006/relationships">
   <p:cSld>
     <p:spTree>
@@ -1098,7 +1098,7 @@
 </p:notes>
 </file>
 
-<file path=ppt/notesSlides/notesSlide49.xml><?xml version="1.0" encoding="utf-8"?>
+<file path=ppt/notesSlides/notesSlide56.xml><?xml version="1.0" encoding="utf-8"?>
 <p:notes xmlns:a="http://schemas.openxmlformats.org/drawingml/2006/main" xmlns:p="http://schemas.openxmlformats.org/presentationml/2006/main" xmlns:r="http://schemas.openxmlformats.org/officeDocument/2006/relationships">
   <p:cSld>
     <p:spTree>
@@ -1168,7 +1168,7 @@
 </p:notes>
 </file>
 
-<file path=ppt/notesSlides/notesSlide50.xml><?xml version="1.0" encoding="utf-8"?>
+<file path=ppt/notesSlides/notesSlide57.xml><?xml version="1.0" encoding="utf-8"?>
 <p:notes xmlns:a="http://schemas.openxmlformats.org/drawingml/2006/main" xmlns:p="http://schemas.openxmlformats.org/presentationml/2006/main" xmlns:r="http://schemas.openxmlformats.org/officeDocument/2006/relationships">
   <p:cSld>
     <p:spTree>
@@ -1244,7 +1244,7 @@
 </p:notes>
 </file>
 
-<file path=ppt/notesSlides/notesSlide51.xml><?xml version="1.0" encoding="utf-8"?>
+<file path=ppt/notesSlides/notesSlide58.xml><?xml version="1.0" encoding="utf-8"?>
 <p:notes xmlns:a="http://schemas.openxmlformats.org/drawingml/2006/main" xmlns:p="http://schemas.openxmlformats.org/presentationml/2006/main" xmlns:r="http://schemas.openxmlformats.org/officeDocument/2006/relationships">
   <p:cSld>
     <p:spTree>
@@ -1314,7 +1314,7 @@
 </p:notes>
 </file>
 
-<file path=ppt/notesSlides/notesSlide52.xml><?xml version="1.0" encoding="utf-8"?>
+<file path=ppt/notesSlides/notesSlide59.xml><?xml version="1.0" encoding="utf-8"?>
 <p:notes xmlns:a="http://schemas.openxmlformats.org/drawingml/2006/main" xmlns:p="http://schemas.openxmlformats.org/presentationml/2006/main" xmlns:r="http://schemas.openxmlformats.org/officeDocument/2006/relationships">
   <p:cSld>
     <p:spTree>
@@ -1390,7 +1390,7 @@
 </p:notes>
 </file>
 
-<file path=ppt/notesSlides/notesSlide53.xml><?xml version="1.0" encoding="utf-8"?>
+<file path=ppt/notesSlides/notesSlide60.xml><?xml version="1.0" encoding="utf-8"?>
 <p:notes xmlns:a="http://schemas.openxmlformats.org/drawingml/2006/main" xmlns:p="http://schemas.openxmlformats.org/presentationml/2006/main" xmlns:r="http://schemas.openxmlformats.org/officeDocument/2006/relationships">
   <p:cSld>
     <p:spTree>
@@ -11596,8 +11596,8 @@
 </p:sldMaster>
 </file>
 
-<file path=ppt/slides/slide1.xml><?xml version="1.0" encoding="utf-8"?>
-<p:sld xmlns:a="http://schemas.openxmlformats.org/drawingml/2006/main" xmlns:r="http://schemas.openxmlformats.org/officeDocument/2006/relationships" xmlns:p="http://schemas.openxmlformats.org/presentationml/2006/main">
+<file path=ppt/slides/slide53.xml><?xml version="1.0" encoding="utf-8"?>
+<p:sld xmlns:a="http://schemas.openxmlformats.org/drawingml/2006/main" xmlns:p="http://schemas.openxmlformats.org/presentationml/2006/main" xmlns:r="http://schemas.openxmlformats.org/officeDocument/2006/relationships">
   <p:cSld>
     <p:spTree>
       <p:nvGrpSpPr>
@@ -11605,222 +11605,133 @@
         <p:cNvGrpSpPr/>
         <p:nvPr/>
       </p:nvGrpSpPr>
-      <p:grpSpPr>
-        <a:xfrm>
-          <a:off x="0" y="0"/>
-          <a:ext cx="0" cy="0"/>
-          <a:chOff x="0" y="0"/>
-          <a:chExt cx="0" cy="0"/>
-        </a:xfrm>
-      </p:grpSpPr>
-      <p:cxnSp>
-        <p:nvCxnSpPr>
-          <p:cNvPr id="11" name="Straight Connector 10">
-            <a:extLst>
-              <a:ext uri="{FF2B5EF4-FFF2-40B4-BE49-F238E27FC236}">
-                <a16:creationId xmlns:a16="http://schemas.microsoft.com/office/drawing/2014/main" id="{D9AD66F2-F7C0-4D03-9150-D28F17AC561D}"/>
-              </a:ext>
-            </a:extLst>
-          </p:cNvPr>
-          <p:cNvCxnSpPr>
-            <a:cxnSpLocks/>
-          </p:cNvCxnSpPr>
+      <p:grpSpPr/>
+      <p:sp>
+        <p:nvSpPr>
+          <p:cNvPr id="2" name="TextBox 1"/>
+          <p:cNvSpPr txBox="1"/>
           <p:nvPr/>
-        </p:nvCxnSpPr>
-        <p:spPr>
-          <a:xfrm>
-            <a:off x="373021" y="2198718"/>
-            <a:ext cx="6843567" cy="0"/>
-          </a:xfrm>
-          <a:prstGeom prst="line">
-            <a:avLst/>
-          </a:prstGeom>
-          <a:ln w="12700">
-            <a:solidFill>
-              <a:srgbClr val="009CD6"/>
-            </a:solidFill>
-          </a:ln>
-        </p:spPr>
-        <p:style>
-          <a:lnRef idx="1">
-            <a:schemeClr val="accent1"/>
-          </a:lnRef>
-          <a:fillRef idx="0">
-            <a:schemeClr val="accent1"/>
-          </a:fillRef>
-          <a:effectRef idx="0">
-            <a:schemeClr val="accent1"/>
-          </a:effectRef>
-          <a:fontRef idx="minor">
-            <a:schemeClr val="tx1"/>
-          </a:fontRef>
-        </p:style>
-      </p:cxnSp>
-      <p:sp>
-        <p:nvSpPr>
-          <p:cNvPr id="12" name="Title 9">
-            <a:extLst>
-              <a:ext uri="{FF2B5EF4-FFF2-40B4-BE49-F238E27FC236}">
-                <a16:creationId xmlns:a16="http://schemas.microsoft.com/office/drawing/2014/main" id="{EEB08032-CE0E-4986-AEDF-A41026C0E8B9}"/>
-              </a:ext>
-            </a:extLst>
-          </p:cNvPr>
-          <p:cNvSpPr txBox="1">
-            <a:spLocks/>
-          </p:cNvSpPr>
-          <p:nvPr/>
-        </p:nvSpPr>
-        <p:spPr>
-          <a:xfrm>
-            <a:off x="237734" y="702833"/>
-            <a:ext cx="6432007" cy="1218817"/>
+        </p:nvSpPr>
+        <p:spPr>
+          <a:xfrm>
+            <a:off x="822960" y="822960"/>
+            <a:ext cx="7315200" cy="457200"/>
           </a:xfrm>
           <a:prstGeom prst="rect">
             <a:avLst/>
           </a:prstGeom>
-        </p:spPr>
-        <p:txBody>
-          <a:bodyPr anchor="b">
-            <a:noAutofit/>
+          <a:noFill/>
+        </p:spPr>
+        <p:txBody>
+          <a:bodyPr wrap="square">
+            <a:spAutoFit/>
           </a:bodyPr>
-          <a:lstStyle>
-            <a:lvl1pPr algn="l" defTabSz="914400" rtl="0" eaLnBrk="1" latinLnBrk="0" hangingPunct="1">
-              <a:lnSpc>
-                <a:spcPct val="90000"/>
-              </a:lnSpc>
-              <a:spcBef>
-                <a:spcPct val="0"/>
-              </a:spcBef>
-              <a:buNone/>
-              <a:defRPr sz="4000" kern="1200">
+          <a:lstStyle/>
+          <a:p>
+            <a:r>
+              <a:rPr sz="1200" b="1" i="0">
                 <a:solidFill>
-                  <a:schemeClr val="bg1"/>
+                  <a:srgbClr val="595959"/>
                 </a:solidFill>
-                <a:latin typeface="Arial" panose="020B0604020202020204" pitchFamily="34" charset="0"/>
-                <a:ea typeface="+mj-ea"/>
-                <a:cs typeface="Arial" panose="020B0604020202020204" pitchFamily="34" charset="0"/>
-              </a:defRPr>
-            </a:lvl1pPr>
-          </a:lstStyle>
-          <a:p>
-            <a:r>
-              <a:rPr sz="2800" b="1" i="0">
+                <a:latin typeface="Arial"/>
+              </a:rPr>
+              <a:t>KP1 · MODULE 2 · VIDEO 2.7</a:t>
+            </a:r>
+          </a:p>
+        </p:txBody>
+      </p:sp>
+      <p:sp>
+        <p:nvSpPr>
+          <p:cNvPr id="3" name="TextBox 2"/>
+          <p:cNvSpPr txBox="1"/>
+          <p:nvPr/>
+        </p:nvSpPr>
+        <p:spPr>
+          <a:xfrm>
+            <a:off x="822960" y="1828800"/>
+            <a:ext cx="2011680" cy="1097280"/>
+          </a:xfrm>
+          <a:prstGeom prst="rect">
+            <a:avLst/>
+          </a:prstGeom>
+          <a:noFill/>
+        </p:spPr>
+        <p:txBody>
+          <a:bodyPr wrap="square">
+            <a:spAutoFit/>
+          </a:bodyPr>
+          <a:lstStyle/>
+          <a:p>
+            <a:r>
+              <a:rPr sz="6000" b="1" i="0">
+                <a:solidFill>
+                  <a:srgbClr val="009CD6"/>
+                </a:solidFill>
+                <a:latin typeface="Arial"/>
+              </a:rPr>
+              <a:t>2.7</a:t>
+            </a:r>
+          </a:p>
+        </p:txBody>
+      </p:sp>
+      <p:sp>
+        <p:nvSpPr>
+          <p:cNvPr id="4" name="TextBox 3"/>
+          <p:cNvSpPr txBox="1"/>
+          <p:nvPr/>
+        </p:nvSpPr>
+        <p:spPr>
+          <a:xfrm>
+            <a:off x="822960" y="2880360"/>
+            <a:ext cx="9601200" cy="1371600"/>
+          </a:xfrm>
+          <a:prstGeom prst="rect">
+            <a:avLst/>
+          </a:prstGeom>
+          <a:noFill/>
+        </p:spPr>
+        <p:txBody>
+          <a:bodyPr wrap="square">
+            <a:spAutoFit/>
+          </a:bodyPr>
+          <a:lstStyle/>
+          <a:p>
+            <a:r>
+              <a:rPr sz="3400" b="1" i="0">
                 <a:solidFill>
                   <a:srgbClr val="1A1A1A"/>
                 </a:solidFill>
                 <a:latin typeface="Arial"/>
               </a:rPr>
-              <a:t>2.7 — The two traps to catch at Assess</a:t>
-            </a:r>
-          </a:p>
-        </p:txBody>
-      </p:sp>
-      <p:pic>
-        <p:nvPicPr>
-          <p:cNvPr id="7" name="Picture 6">
-            <a:extLst>
-              <a:ext uri="{FF2B5EF4-FFF2-40B4-BE49-F238E27FC236}">
-                <a16:creationId xmlns:a16="http://schemas.microsoft.com/office/drawing/2014/main" id="{A2066351-C569-4C4C-A096-308777FCDC32}"/>
-              </a:ext>
-            </a:extLst>
-          </p:cNvPr>
-          <p:cNvPicPr>
-            <a:picLocks noChangeAspect="1"/>
-          </p:cNvPicPr>
+              <a:t>The two traps to catch at Assess — bespoke and vendor-driven</a:t>
+            </a:r>
+          </a:p>
+        </p:txBody>
+      </p:sp>
+      <p:sp>
+        <p:nvSpPr>
+          <p:cNvPr id="5" name="TextBox 4"/>
+          <p:cNvSpPr txBox="1"/>
           <p:nvPr/>
-        </p:nvPicPr>
-        <p:blipFill>
-          <a:blip r:embed="rId2">
-            <a:extLst>
-              <a:ext uri="{28A0092B-C50C-407E-A947-70E740481C1C}">
-                <a14:useLocalDpi xmlns:a14="http://schemas.microsoft.com/office/drawing/2010/main" val="0"/>
-              </a:ext>
-            </a:extLst>
-          </a:blip>
-          <a:srcRect t="20219" b="14729"/>
-          <a:stretch>
-            <a:fillRect/>
-          </a:stretch>
-        </p:blipFill>
-        <p:spPr>
-          <a:xfrm>
-            <a:off x="0" y="5620871"/>
-            <a:ext cx="1323975" cy="1218816"/>
+        </p:nvSpPr>
+        <p:spPr>
+          <a:xfrm>
+            <a:off x="822960" y="4343400"/>
+            <a:ext cx="9875520" cy="1554480"/>
           </a:xfrm>
           <a:prstGeom prst="rect">
             <a:avLst/>
           </a:prstGeom>
-        </p:spPr>
-      </p:pic>
-      <p:sp>
-        <p:nvSpPr>
-          <p:cNvPr id="14" name="Title 9">
-            <a:extLst>
-              <a:ext uri="{FF2B5EF4-FFF2-40B4-BE49-F238E27FC236}">
-                <a16:creationId xmlns:a16="http://schemas.microsoft.com/office/drawing/2014/main" id="{B5087B80-3EE4-1881-0130-ED58CA625092}"/>
-              </a:ext>
-            </a:extLst>
-          </p:cNvPr>
-          <p:cNvSpPr txBox="1">
-            <a:spLocks/>
-          </p:cNvSpPr>
-          <p:nvPr/>
-        </p:nvSpPr>
-        <p:spPr>
-          <a:xfrm>
-            <a:off x="284452" y="2475786"/>
-            <a:ext cx="6382893" cy="953213"/>
-          </a:xfrm>
-          <a:prstGeom prst="rect">
-            <a:avLst/>
-          </a:prstGeom>
-        </p:spPr>
-        <p:txBody>
-          <a:bodyPr anchor="t">
-            <a:noAutofit/>
+          <a:noFill/>
+        </p:spPr>
+        <p:txBody>
+          <a:bodyPr wrap="square">
+            <a:spAutoFit/>
           </a:bodyPr>
-          <a:lstStyle>
-            <a:lvl1pPr algn="l" defTabSz="914400" rtl="0" eaLnBrk="1" latinLnBrk="0" hangingPunct="1">
-              <a:lnSpc>
-                <a:spcPct val="90000"/>
-              </a:lnSpc>
-              <a:spcBef>
-                <a:spcPct val="0"/>
-              </a:spcBef>
-              <a:buNone/>
-              <a:defRPr sz="4000" kern="1200">
-                <a:solidFill>
-                  <a:schemeClr val="bg1"/>
-                </a:solidFill>
-                <a:latin typeface="Arial" panose="020B0604020202020204" pitchFamily="34" charset="0"/>
-                <a:ea typeface="+mj-ea"/>
-                <a:cs typeface="Arial" panose="020B0604020202020204" pitchFamily="34" charset="0"/>
-              </a:defRPr>
-            </a:lvl1pPr>
-          </a:lstStyle>
-          <a:p>
-            <a:pPr marL="0" marR="0" lvl="0" indent="0" rtl="0">
-              <a:spcBef>
-                <a:spcPts val="600"/>
-              </a:spcBef>
-              <a:spcAft>
-                <a:spcPts val="0"/>
-              </a:spcAft>
-              <a:buNone/>
-            </a:pPr>
-            <a:r>
-              <a:rPr sz="1300" b="1" i="0">
-                <a:solidFill>
-                  <a:srgbClr val="006E96"/>
-                </a:solidFill>
-                <a:latin typeface="Arial"/>
-              </a:rPr>
-              <a:t>KP1 · Government Enterprise Architecture · Module 2 · Video 2.7</a:t>
-            </a:r>
-          </a:p>
-          <a:p>
-            <a:r>
-              <a:rPr sz="1200" b="0" i="1">
+          <a:lstStyle/>
+          <a:p>
+            <a:r>
+              <a:rPr sz="1700" b="0" i="1">
                 <a:solidFill>
                   <a:srgbClr val="595959"/>
                 </a:solidFill>
@@ -11833,91 +11744,276 @@
       </p:sp>
       <p:sp>
         <p:nvSpPr>
-          <p:cNvPr id="17" name="Title 9">
-            <a:extLst>
-              <a:ext uri="{FF2B5EF4-FFF2-40B4-BE49-F238E27FC236}">
-                <a16:creationId xmlns:a16="http://schemas.microsoft.com/office/drawing/2014/main" id="{5E8796F7-DD26-D250-5E97-B38B22298E72}"/>
-              </a:ext>
-            </a:extLst>
-          </p:cNvPr>
-          <p:cNvSpPr txBox="1">
-            <a:spLocks/>
-          </p:cNvSpPr>
+          <p:cNvPr id="6" name="TextBox 5"/>
+          <p:cNvSpPr txBox="1"/>
           <p:nvPr/>
         </p:nvSpPr>
         <p:spPr>
           <a:xfrm>
-            <a:off x="284452" y="4363897"/>
-            <a:ext cx="6382893" cy="953213"/>
+            <a:off x="822960" y="5989320"/>
+            <a:ext cx="7315200" cy="365760"/>
           </a:xfrm>
           <a:prstGeom prst="rect">
             <a:avLst/>
           </a:prstGeom>
-        </p:spPr>
-        <p:txBody>
-          <a:bodyPr anchor="t">
-            <a:noAutofit/>
+          <a:noFill/>
+        </p:spPr>
+        <p:txBody>
+          <a:bodyPr wrap="square">
+            <a:spAutoFit/>
           </a:bodyPr>
-          <a:lstStyle>
-            <a:lvl1pPr algn="l" defTabSz="914400" rtl="0" eaLnBrk="1" latinLnBrk="0" hangingPunct="1">
-              <a:lnSpc>
-                <a:spcPct val="90000"/>
-              </a:lnSpc>
-              <a:spcBef>
-                <a:spcPct val="0"/>
-              </a:spcBef>
-              <a:buNone/>
-              <a:defRPr sz="4000" kern="1200">
+          <a:lstStyle/>
+          <a:p>
+            <a:r>
+              <a:rPr sz="1200" b="0" i="0">
                 <a:solidFill>
-                  <a:schemeClr val="bg1"/>
+                  <a:srgbClr val="595959"/>
                 </a:solidFill>
-                <a:latin typeface="Arial" panose="020B0604020202020204" pitchFamily="34" charset="0"/>
-                <a:ea typeface="+mj-ea"/>
-                <a:cs typeface="Arial" panose="020B0604020202020204" pitchFamily="34" charset="0"/>
-              </a:defRPr>
-            </a:lvl1pPr>
-          </a:lstStyle>
-          <a:p>
-            <a:pPr marL="0" marR="0" lvl="0" indent="0" rtl="0">
-              <a:spcBef>
-                <a:spcPts val="600"/>
-              </a:spcBef>
-              <a:spcAft>
-                <a:spcPts val="1200"/>
-              </a:spcAft>
-              <a:buNone/>
-            </a:pPr>
-            <a:r>
-              <a:rPr sz="1400" b="1" i="0">
+                <a:latin typeface="Arial"/>
+              </a:rPr>
+              <a:t>~4 minutes · standalone video · voice-over on text slides</a:t>
+            </a:r>
+          </a:p>
+        </p:txBody>
+      </p:sp>
+    </p:spTree>
+  </p:cSld>
+  <p:clrMapOvr>
+    <a:masterClrMapping/>
+  </p:clrMapOvr>
+</p:sld>
+</file>
+
+<file path=ppt/slides/slide54.xml><?xml version="1.0" encoding="utf-8"?>
+<p:sld xmlns:a="http://schemas.openxmlformats.org/drawingml/2006/main" xmlns:p="http://schemas.openxmlformats.org/presentationml/2006/main" xmlns:r="http://schemas.openxmlformats.org/officeDocument/2006/relationships">
+  <p:cSld>
+    <p:spTree>
+      <p:nvGrpSpPr>
+        <p:cNvPr id="1" name=""/>
+        <p:cNvGrpSpPr/>
+        <p:nvPr/>
+      </p:nvGrpSpPr>
+      <p:grpSpPr/>
+      <p:sp>
+        <p:nvSpPr>
+          <p:cNvPr id="2" name="TextBox 1"/>
+          <p:cNvSpPr txBox="1"/>
+          <p:nvPr/>
+        </p:nvSpPr>
+        <p:spPr>
+          <a:xfrm>
+            <a:off x="1005840" y="1325880"/>
+            <a:ext cx="5486400" cy="365760"/>
+          </a:xfrm>
+          <a:prstGeom prst="rect">
+            <a:avLst/>
+          </a:prstGeom>
+          <a:noFill/>
+        </p:spPr>
+        <p:txBody>
+          <a:bodyPr wrap="square">
+            <a:spAutoFit/>
+          </a:bodyPr>
+          <a:lstStyle/>
+          <a:p>
+            <a:r>
+              <a:rPr sz="1200" b="1" i="0">
+                <a:solidFill>
+                  <a:srgbClr val="006E96"/>
+                </a:solidFill>
+                <a:latin typeface="Arial"/>
+              </a:rPr>
+              <a:t>WHERE WE START</a:t>
+            </a:r>
+          </a:p>
+        </p:txBody>
+      </p:sp>
+      <p:sp>
+        <p:nvSpPr>
+          <p:cNvPr id="3" name="TextBox 2"/>
+          <p:cNvSpPr txBox="1"/>
+          <p:nvPr/>
+        </p:nvSpPr>
+        <p:spPr>
+          <a:xfrm>
+            <a:off x="1005840" y="1783080"/>
+            <a:ext cx="10149840" cy="1737360"/>
+          </a:xfrm>
+          <a:prstGeom prst="rect">
+            <a:avLst/>
+          </a:prstGeom>
+          <a:noFill/>
+        </p:spPr>
+        <p:txBody>
+          <a:bodyPr wrap="square">
+            <a:spAutoFit/>
+          </a:bodyPr>
+          <a:lstStyle/>
+          <a:p>
+            <a:r>
+              <a:rPr sz="3000" b="1" i="0">
                 <a:solidFill>
                   <a:srgbClr val="1A1A1A"/>
                 </a:solidFill>
                 <a:latin typeface="Arial"/>
               </a:rPr>
-              <a:t>Target audience: </a:t>
-            </a:r>
-            <a:r>
-              <a:rPr sz="1400" b="0" i="0">
+              <a:t>Two traps — cheap to stop while they are still a line in a project plan.</a:t>
+            </a:r>
+          </a:p>
+        </p:txBody>
+      </p:sp>
+      <p:sp>
+        <p:nvSpPr>
+          <p:cNvPr id="4" name="TextBox 3"/>
+          <p:cNvSpPr txBox="1"/>
+          <p:nvPr/>
+        </p:nvSpPr>
+        <p:spPr>
+          <a:xfrm>
+            <a:off x="1005840" y="3611880"/>
+            <a:ext cx="10149840" cy="2377440"/>
+          </a:xfrm>
+          <a:prstGeom prst="rect">
+            <a:avLst/>
+          </a:prstGeom>
+          <a:noFill/>
+        </p:spPr>
+        <p:txBody>
+          <a:bodyPr wrap="square">
+            <a:spAutoFit/>
+          </a:bodyPr>
+          <a:lstStyle/>
+          <a:p>
+            <a:pPr>
+              <a:spcAft>
+                <a:spcPts val="800"/>
+              </a:spcAft>
+            </a:pPr>
+            <a:r>
+              <a:rPr sz="1700" b="0" i="0">
                 <a:solidFill>
-                  <a:srgbClr val="1A1A1A"/>
+                  <a:srgbClr val="595959"/>
                 </a:solidFill>
                 <a:latin typeface="Arial"/>
               </a:rPr>
-              <a:t>Chief architect · senior architect · sector ICT lead</a:t>
-            </a:r>
-          </a:p>
-        </p:txBody>
-      </p:sp>
-      <p:sp>
-        <p:nvSpPr>
-          <p:cNvPr id="18" name="Rectangle 17"/>
+              <a:t>Governments fall into them again and again.</a:t>
+            </a:r>
+          </a:p>
+          <a:p>
+            <a:pPr>
+              <a:spcAft>
+                <a:spcPts val="800"/>
+              </a:spcAft>
+            </a:pPr>
+            <a:r>
+              <a:rPr sz="1700" b="0" i="0">
+                <a:solidFill>
+                  <a:srgbClr val="595959"/>
+                </a:solidFill>
+                <a:latin typeface="Arial"/>
+              </a:rPr>
+              <a:t>At the Assess phase, you are the one positioned to spot them — before they are built.</a:t>
+            </a:r>
+          </a:p>
+        </p:txBody>
+      </p:sp>
+      <p:sp>
+        <p:nvSpPr>
+          <p:cNvPr id="5" name="TextBox 4"/>
+          <p:cNvSpPr txBox="1"/>
+          <p:nvPr/>
+        </p:nvSpPr>
+        <p:spPr>
+          <a:xfrm>
+            <a:off x="457200" y="6473952"/>
+            <a:ext cx="7772400" cy="292608"/>
+          </a:xfrm>
+          <a:prstGeom prst="rect">
+            <a:avLst/>
+          </a:prstGeom>
+          <a:noFill/>
+        </p:spPr>
+        <p:txBody>
+          <a:bodyPr wrap="square">
+            <a:spAutoFit/>
+          </a:bodyPr>
+          <a:lstStyle/>
+          <a:p>
+            <a:r>
+              <a:rPr sz="900" b="0" i="0">
+                <a:solidFill>
+                  <a:srgbClr val="595959"/>
+                </a:solidFill>
+                <a:latin typeface="Arial"/>
+              </a:rPr>
+              <a:t>2.7 · The two traps to catch at Assess — bespoke and vendor-driven</a:t>
+            </a:r>
+          </a:p>
+        </p:txBody>
+      </p:sp>
+      <p:sp>
+        <p:nvSpPr>
+          <p:cNvPr id="6" name="TextBox 5"/>
+          <p:cNvSpPr txBox="1"/>
+          <p:nvPr/>
+        </p:nvSpPr>
+        <p:spPr>
+          <a:xfrm>
+            <a:off x="10058400" y="6473952"/>
+            <a:ext cx="1673352" cy="292608"/>
+          </a:xfrm>
+          <a:prstGeom prst="rect">
+            <a:avLst/>
+          </a:prstGeom>
+          <a:noFill/>
+        </p:spPr>
+        <p:txBody>
+          <a:bodyPr wrap="square">
+            <a:spAutoFit/>
+          </a:bodyPr>
+          <a:lstStyle/>
+          <a:p>
+            <a:pPr algn="r"/>
+            <a:r>
+              <a:rPr sz="900" b="0" i="0">
+                <a:solidFill>
+                  <a:srgbClr val="595959"/>
+                </a:solidFill>
+                <a:latin typeface="Arial"/>
+              </a:rPr>
+              <a:t>www.itu.int</a:t>
+            </a:r>
+          </a:p>
+        </p:txBody>
+      </p:sp>
+    </p:spTree>
+  </p:cSld>
+  <p:clrMapOvr>
+    <a:masterClrMapping/>
+  </p:clrMapOvr>
+</p:sld>
+</file>
+
+<file path=ppt/slides/slide55.xml><?xml version="1.0" encoding="utf-8"?>
+<p:sld xmlns:a="http://schemas.openxmlformats.org/drawingml/2006/main" xmlns:p="http://schemas.openxmlformats.org/presentationml/2006/main" xmlns:r="http://schemas.openxmlformats.org/officeDocument/2006/relationships">
+  <p:cSld>
+    <p:spTree>
+      <p:nvGrpSpPr>
+        <p:cNvPr id="1" name=""/>
+        <p:cNvGrpSpPr/>
+        <p:nvPr/>
+      </p:nvGrpSpPr>
+      <p:grpSpPr/>
+      <p:sp>
+        <p:nvSpPr>
+          <p:cNvPr id="2" name="Rectangle 1"/>
           <p:cNvSpPr/>
           <p:nvPr/>
         </p:nvSpPr>
         <p:spPr>
           <a:xfrm>
-            <a:off x="7022592" y="0"/>
-            <a:ext cx="5169103" cy="6858000"/>
+            <a:off x="457200" y="384048"/>
+            <a:ext cx="45720" cy="256032"/>
           </a:xfrm>
           <a:prstGeom prst="rect">
             <a:avLst/>
@@ -11954,14 +12050,14 @@
       </p:sp>
       <p:sp>
         <p:nvSpPr>
-          <p:cNvPr id="19" name="TextBox 18"/>
+          <p:cNvPr id="3" name="TextBox 2"/>
           <p:cNvSpPr txBox="1"/>
           <p:nvPr/>
         </p:nvSpPr>
         <p:spPr>
           <a:xfrm>
-            <a:off x="7452360" y="457200"/>
-            <a:ext cx="4297680" cy="457200"/>
+            <a:off x="621792" y="274320"/>
+            <a:ext cx="11247120" cy="914400"/>
           </a:xfrm>
           <a:prstGeom prst="rect">
             <a:avLst/>
@@ -11975,35 +12071,90 @@
           <a:lstStyle/>
           <a:p>
             <a:r>
-              <a:rPr sz="1100" b="1" i="0">
+              <a:rPr sz="2800" b="1" i="0">
                 <a:solidFill>
-                  <a:srgbClr val="E5F5FB"/>
+                  <a:srgbClr val="1A1A1A"/>
                 </a:solidFill>
                 <a:latin typeface="Arial"/>
               </a:rPr>
-              <a:t>THE FOUR LAYERS THIS MODULE TEACHES</a:t>
-            </a:r>
-          </a:p>
-        </p:txBody>
-      </p:sp>
-      <p:sp>
-        <p:nvSpPr>
-          <p:cNvPr id="20" name="Rounded Rectangle 19"/>
+              <a:t>Trap one — building your own is rational for a project and ruinous for a country</a:t>
+            </a:r>
+          </a:p>
+        </p:txBody>
+      </p:sp>
+      <p:sp>
+        <p:nvSpPr>
+          <p:cNvPr id="4" name="TextBox 3"/>
+          <p:cNvSpPr txBox="1"/>
+          <p:nvPr/>
+        </p:nvSpPr>
+        <p:spPr>
+          <a:xfrm>
+            <a:off x="658368" y="1600200"/>
+            <a:ext cx="10881360" cy="2651760"/>
+          </a:xfrm>
+          <a:prstGeom prst="rect">
+            <a:avLst/>
+          </a:prstGeom>
+          <a:noFill/>
+        </p:spPr>
+        <p:txBody>
+          <a:bodyPr wrap="square">
+            <a:spAutoFit/>
+          </a:bodyPr>
+          <a:lstStyle/>
+          <a:p>
+            <a:pPr>
+              <a:spcAft>
+                <a:spcPts val="1200"/>
+              </a:spcAft>
+            </a:pPr>
+            <a:r>
+              <a:rPr sz="2000" b="0" i="0">
+                <a:solidFill>
+                  <a:srgbClr val="1A1A1A"/>
+                </a:solidFill>
+                <a:latin typeface="Arial"/>
+              </a:rPr>
+              <a:t>A new project needs to identify citizens. Reusing the national platform means learning it, negotiating with the body that owns it, and accepting their timelines. Building its own small identity function is faster — for this project. So it builds its own.</a:t>
+            </a:r>
+          </a:p>
+          <a:p>
+            <a:pPr>
+              <a:spcAft>
+                <a:spcPts val="1200"/>
+              </a:spcAft>
+            </a:pPr>
+            <a:r>
+              <a:rPr sz="2000" b="0" i="0">
+                <a:solidFill>
+                  <a:srgbClr val="1A1A1A"/>
+                </a:solidFill>
+                <a:latin typeface="Arial"/>
+              </a:rPr>
+              <a:t>This is not laziness. Inside the project, building is the rational choice, every time. Multiply it across ten projects and the country has ten identity functions, ten learner lists, ten payment integrations.</a:t>
+            </a:r>
+          </a:p>
+        </p:txBody>
+      </p:sp>
+      <p:sp>
+        <p:nvSpPr>
+          <p:cNvPr id="5" name="Rounded Rectangle 4"/>
           <p:cNvSpPr/>
           <p:nvPr/>
         </p:nvSpPr>
         <p:spPr>
           <a:xfrm>
-            <a:off x="7452360" y="960120"/>
-            <a:ext cx="3840480" cy="658368"/>
+            <a:off x="658368" y="4434840"/>
+            <a:ext cx="10881360" cy="1325880"/>
           </a:xfrm>
           <a:prstGeom prst="roundRect">
             <a:avLst>
-              <a:gd name="adj" fmla="val 14000"/>
+              <a:gd name="adj" fmla="val 4500"/>
             </a:avLst>
           </a:prstGeom>
           <a:solidFill>
-            <a:srgbClr val="FFFFFF"/>
+            <a:srgbClr val="009CD6"/>
           </a:solidFill>
           <a:ln>
             <a:noFill/>
@@ -12025,40 +12176,120 @@
           </a:fontRef>
         </p:style>
         <p:txBody>
-          <a:bodyPr rtlCol="0" anchor="ctr" lIns="164592" wrap="square"/>
+          <a:bodyPr rtlCol="0" anchor="ctr"/>
           <a:lstStyle/>
           <a:p>
             <a:pPr algn="ctr"/>
-            <a:r>
-              <a:rPr sz="1500" b="1" i="0">
+          </a:p>
+        </p:txBody>
+      </p:sp>
+      <p:sp>
+        <p:nvSpPr>
+          <p:cNvPr id="6" name="TextBox 5"/>
+          <p:cNvSpPr txBox="1"/>
+          <p:nvPr/>
+        </p:nvSpPr>
+        <p:spPr>
+          <a:xfrm>
+            <a:off x="859536" y="4626864"/>
+            <a:ext cx="10479024" cy="1051560"/>
+          </a:xfrm>
+          <a:prstGeom prst="rect">
+            <a:avLst/>
+          </a:prstGeom>
+          <a:noFill/>
+        </p:spPr>
+        <p:txBody>
+          <a:bodyPr wrap="square">
+            <a:spAutoFit/>
+          </a:bodyPr>
+          <a:lstStyle/>
+          <a:p>
+            <a:pPr>
+              <a:spcAft>
+                <a:spcPts val="700"/>
+              </a:spcAft>
+            </a:pPr>
+            <a:r>
+              <a:rPr sz="2300" b="1" i="0">
                 <a:solidFill>
-                  <a:srgbClr val="1A1A1A"/>
+                  <a:srgbClr val="FFFFFF"/>
                 </a:solidFill>
                 <a:latin typeface="Arial"/>
               </a:rPr>
-              <a:t>Business — what the body does</a:t>
-            </a:r>
-          </a:p>
-        </p:txBody>
-      </p:sp>
-      <p:sp>
-        <p:nvSpPr>
-          <p:cNvPr id="21" name="Rounded Rectangle 20"/>
+              <a:t>The country has paid ten times for what it should have built once.</a:t>
+            </a:r>
+          </a:p>
+        </p:txBody>
+      </p:sp>
+      <p:sp>
+        <p:nvSpPr>
+          <p:cNvPr id="7" name="TextBox 6"/>
+          <p:cNvSpPr txBox="1"/>
+          <p:nvPr/>
+        </p:nvSpPr>
+        <p:spPr>
+          <a:xfrm>
+            <a:off x="457200" y="6473952"/>
+            <a:ext cx="7772400" cy="292608"/>
+          </a:xfrm>
+          <a:prstGeom prst="rect">
+            <a:avLst/>
+          </a:prstGeom>
+          <a:noFill/>
+        </p:spPr>
+        <p:txBody>
+          <a:bodyPr wrap="square">
+            <a:spAutoFit/>
+          </a:bodyPr>
+          <a:lstStyle/>
+          <a:p>
+            <a:r>
+              <a:rPr sz="900" b="0" i="0">
+                <a:solidFill>
+                  <a:srgbClr val="595959"/>
+                </a:solidFill>
+                <a:latin typeface="Arial"/>
+              </a:rPr>
+              <a:t>2.7 · The two traps to catch at Assess</a:t>
+            </a:r>
+          </a:p>
+        </p:txBody>
+      </p:sp>
+    </p:spTree>
+  </p:cSld>
+  <p:clrMapOvr>
+    <a:masterClrMapping/>
+  </p:clrMapOvr>
+</p:sld>
+</file>
+
+<file path=ppt/slides/slide56.xml><?xml version="1.0" encoding="utf-8"?>
+<p:sld xmlns:a="http://schemas.openxmlformats.org/drawingml/2006/main" xmlns:p="http://schemas.openxmlformats.org/presentationml/2006/main" xmlns:r="http://schemas.openxmlformats.org/officeDocument/2006/relationships">
+  <p:cSld>
+    <p:spTree>
+      <p:nvGrpSpPr>
+        <p:cNvPr id="1" name=""/>
+        <p:cNvGrpSpPr/>
+        <p:nvPr/>
+      </p:nvGrpSpPr>
+      <p:grpSpPr/>
+      <p:sp>
+        <p:nvSpPr>
+          <p:cNvPr id="2" name="Rectangle 1"/>
           <p:cNvSpPr/>
           <p:nvPr/>
         </p:nvSpPr>
         <p:spPr>
           <a:xfrm>
-            <a:off x="7452360" y="1892808"/>
-            <a:ext cx="3840480" cy="658368"/>
-          </a:xfrm>
-          <a:prstGeom prst="roundRect">
-            <a:avLst>
-              <a:gd name="adj" fmla="val 14000"/>
-            </a:avLst>
+            <a:off x="457200" y="384048"/>
+            <a:ext cx="45720" cy="256032"/>
+          </a:xfrm>
+          <a:prstGeom prst="rect">
+            <a:avLst/>
           </a:prstGeom>
           <a:solidFill>
-            <a:srgbClr val="FFFFFF"/>
+            <a:srgbClr val="009CD6"/>
           </a:solidFill>
           <a:ln>
             <a:noFill/>
@@ -12080,40 +12311,65 @@
           </a:fontRef>
         </p:style>
         <p:txBody>
-          <a:bodyPr rtlCol="0" anchor="ctr" lIns="164592" wrap="square"/>
+          <a:bodyPr rtlCol="0" anchor="ctr"/>
           <a:lstStyle/>
           <a:p>
             <a:pPr algn="ctr"/>
-            <a:r>
-              <a:rPr sz="1500" b="1" i="0">
+          </a:p>
+        </p:txBody>
+      </p:sp>
+      <p:sp>
+        <p:nvSpPr>
+          <p:cNvPr id="3" name="TextBox 2"/>
+          <p:cNvSpPr txBox="1"/>
+          <p:nvPr/>
+        </p:nvSpPr>
+        <p:spPr>
+          <a:xfrm>
+            <a:off x="621792" y="274320"/>
+            <a:ext cx="11247120" cy="914400"/>
+          </a:xfrm>
+          <a:prstGeom prst="rect">
+            <a:avLst/>
+          </a:prstGeom>
+          <a:noFill/>
+        </p:spPr>
+        <p:txBody>
+          <a:bodyPr wrap="square">
+            <a:spAutoFit/>
+          </a:bodyPr>
+          <a:lstStyle/>
+          <a:p>
+            <a:r>
+              <a:rPr sz="2800" b="1" i="0">
                 <a:solidFill>
                   <a:srgbClr val="1A1A1A"/>
                 </a:solidFill>
                 <a:latin typeface="Arial"/>
               </a:rPr>
-              <a:t>Data — what it holds, who owns it</a:t>
-            </a:r>
-          </a:p>
-        </p:txBody>
-      </p:sp>
-      <p:sp>
-        <p:nvSpPr>
-          <p:cNvPr id="22" name="Rounded Rectangle 21"/>
+              <a:t>Procurement rules cannot catch it — that is why this is architecture work</a:t>
+            </a:r>
+          </a:p>
+        </p:txBody>
+      </p:sp>
+      <p:sp>
+        <p:nvSpPr>
+          <p:cNvPr id="4" name="Rounded Rectangle 3"/>
           <p:cNvSpPr/>
           <p:nvPr/>
         </p:nvSpPr>
         <p:spPr>
           <a:xfrm>
-            <a:off x="7452360" y="2825496"/>
-            <a:ext cx="3840480" cy="658368"/>
+            <a:off x="658368" y="1554480"/>
+            <a:ext cx="5394960" cy="3977639"/>
           </a:xfrm>
           <a:prstGeom prst="roundRect">
             <a:avLst>
-              <a:gd name="adj" fmla="val 14000"/>
+              <a:gd name="adj" fmla="val 4500"/>
             </a:avLst>
           </a:prstGeom>
           <a:solidFill>
-            <a:srgbClr val="FFFFFF"/>
+            <a:srgbClr val="E5F5FB"/>
           </a:solidFill>
           <a:ln>
             <a:noFill/>
@@ -12135,40 +12391,102 @@
           </a:fontRef>
         </p:style>
         <p:txBody>
-          <a:bodyPr rtlCol="0" anchor="ctr" lIns="164592" wrap="square"/>
+          <a:bodyPr rtlCol="0" anchor="ctr"/>
           <a:lstStyle/>
           <a:p>
             <a:pPr algn="ctr"/>
-            <a:r>
-              <a:rPr sz="1500" b="1" i="0">
+          </a:p>
+        </p:txBody>
+      </p:sp>
+      <p:sp>
+        <p:nvSpPr>
+          <p:cNvPr id="5" name="TextBox 4"/>
+          <p:cNvSpPr txBox="1"/>
+          <p:nvPr/>
+        </p:nvSpPr>
+        <p:spPr>
+          <a:xfrm>
+            <a:off x="859536" y="1700784"/>
+            <a:ext cx="4992624" cy="3703320"/>
+          </a:xfrm>
+          <a:prstGeom prst="rect">
+            <a:avLst/>
+          </a:prstGeom>
+          <a:noFill/>
+        </p:spPr>
+        <p:txBody>
+          <a:bodyPr wrap="square">
+            <a:spAutoFit/>
+          </a:bodyPr>
+          <a:lstStyle/>
+          <a:p>
+            <a:pPr>
+              <a:spcAft>
+                <a:spcPts val="700"/>
+              </a:spcAft>
+            </a:pPr>
+            <a:r>
+              <a:rPr sz="1900" b="1" i="0">
+                <a:solidFill>
+                  <a:srgbClr val="006E96"/>
+                </a:solidFill>
+                <a:latin typeface="Arial"/>
+              </a:rPr>
+              <a:t>What a rule can do</a:t>
+            </a:r>
+          </a:p>
+          <a:p>
+            <a:pPr>
+              <a:spcAft>
+                <a:spcPts val="700"/>
+              </a:spcAft>
+            </a:pPr>
+            <a:r>
+              <a:rPr sz="1600" b="0" i="0">
                 <a:solidFill>
                   <a:srgbClr val="1A1A1A"/>
                 </a:solidFill>
                 <a:latin typeface="Arial"/>
               </a:rPr>
-              <a:t>Application — what supports the work</a:t>
-            </a:r>
-          </a:p>
-        </p:txBody>
-      </p:sp>
-      <p:sp>
-        <p:nvSpPr>
-          <p:cNvPr id="23" name="Rounded Rectangle 22"/>
+              <a:t>Require open standards.</a:t>
+            </a:r>
+          </a:p>
+          <a:p>
+            <a:pPr>
+              <a:spcAft>
+                <a:spcPts val="700"/>
+              </a:spcAft>
+            </a:pPr>
+            <a:r>
+              <a:rPr sz="1600" b="0" i="0">
+                <a:solidFill>
+                  <a:srgbClr val="1A1A1A"/>
+                </a:solidFill>
+                <a:latin typeface="Arial"/>
+              </a:rPr>
+              <a:t>Set the intention.</a:t>
+            </a:r>
+          </a:p>
+        </p:txBody>
+      </p:sp>
+      <p:sp>
+        <p:nvSpPr>
+          <p:cNvPr id="6" name="Rounded Rectangle 5"/>
           <p:cNvSpPr/>
           <p:nvPr/>
         </p:nvSpPr>
         <p:spPr>
           <a:xfrm>
-            <a:off x="7452360" y="3758184"/>
-            <a:ext cx="3840480" cy="658368"/>
+            <a:off x="6263640" y="1554480"/>
+            <a:ext cx="5394960" cy="3977639"/>
           </a:xfrm>
           <a:prstGeom prst="roundRect">
             <a:avLst>
-              <a:gd name="adj" fmla="val 14000"/>
+              <a:gd name="adj" fmla="val 4500"/>
             </a:avLst>
           </a:prstGeom>
           <a:solidFill>
-            <a:srgbClr val="006E96"/>
+            <a:srgbClr val="F2F2F2"/>
           </a:solidFill>
           <a:ln>
             <a:noFill/>
@@ -12190,32 +12508,23 @@
           </a:fontRef>
         </p:style>
         <p:txBody>
-          <a:bodyPr rtlCol="0" anchor="ctr" lIns="164592" wrap="square"/>
+          <a:bodyPr rtlCol="0" anchor="ctr"/>
           <a:lstStyle/>
           <a:p>
             <a:pPr algn="ctr"/>
-            <a:r>
-              <a:rPr sz="1500" b="1" i="0">
-                <a:solidFill>
-                  <a:srgbClr val="FFFFFF"/>
-                </a:solidFill>
-                <a:latin typeface="Arial"/>
-              </a:rPr>
-              <a:t>Technology — what it all runs on</a:t>
-            </a:r>
-          </a:p>
-        </p:txBody>
-      </p:sp>
-      <p:sp>
-        <p:nvSpPr>
-          <p:cNvPr id="24" name="TextBox 23"/>
+          </a:p>
+        </p:txBody>
+      </p:sp>
+      <p:sp>
+        <p:nvSpPr>
+          <p:cNvPr id="7" name="TextBox 6"/>
           <p:cNvSpPr txBox="1"/>
           <p:nvPr/>
         </p:nvSpPr>
         <p:spPr>
           <a:xfrm>
-            <a:off x="7452360" y="5806440"/>
-            <a:ext cx="4297680" cy="731520"/>
+            <a:off x="6464808" y="1700784"/>
+            <a:ext cx="4992624" cy="3703320"/>
           </a:xfrm>
           <a:prstGeom prst="rect">
             <a:avLst/>
@@ -12228,51 +12537,65 @@
           </a:bodyPr>
           <a:lstStyle/>
           <a:p>
-            <a:r>
-              <a:rPr sz="1200" b="0" i="0">
+            <a:pPr>
+              <a:spcAft>
+                <a:spcPts val="700"/>
+              </a:spcAft>
+            </a:pPr>
+            <a:r>
+              <a:rPr sz="1900" b="1" i="0">
                 <a:solidFill>
-                  <a:srgbClr val="FFFFFF"/>
+                  <a:srgbClr val="006E96"/>
                 </a:solidFill>
                 <a:latin typeface="Arial"/>
               </a:rPr>
-              <a:t>6 shared entities · 10 principles to adopt · 2 traps to catch at Assess</a:t>
-            </a:r>
-          </a:p>
-        </p:txBody>
-      </p:sp>
-    </p:spTree>
-    <p:extLst>
-      <p:ext uri="{BB962C8B-B14F-4D97-AF65-F5344CB8AC3E}">
-        <p14:creationId xmlns:p14="http://schemas.microsoft.com/office/powerpoint/2010/main" val="1196800265"/>
-      </p:ext>
-    </p:extLst>
-  </p:cSld>
-  <p:clrMapOvr>
-    <a:masterClrMapping/>
-  </p:clrMapOvr>
-</p:sld>
-</file>
-
-<file path=ppt/slides/slide47.xml><?xml version="1.0" encoding="utf-8"?>
-<p:sld xmlns:a="http://schemas.openxmlformats.org/drawingml/2006/main" xmlns:p="http://schemas.openxmlformats.org/presentationml/2006/main" xmlns:r="http://schemas.openxmlformats.org/officeDocument/2006/relationships">
-  <p:cSld>
-    <p:spTree>
-      <p:nvGrpSpPr>
-        <p:cNvPr id="1" name=""/>
-        <p:cNvGrpSpPr/>
-        <p:nvPr/>
-      </p:nvGrpSpPr>
-      <p:grpSpPr/>
-      <p:sp>
-        <p:nvSpPr>
-          <p:cNvPr id="2" name="TextBox 1"/>
+              <a:t>What only architecture can do</a:t>
+            </a:r>
+          </a:p>
+          <a:p>
+            <a:pPr>
+              <a:spcAft>
+                <a:spcPts val="700"/>
+              </a:spcAft>
+            </a:pPr>
+            <a:r>
+              <a:rPr sz="1600" b="0" i="0">
+                <a:solidFill>
+                  <a:srgbClr val="1A1A1A"/>
+                </a:solidFill>
+                <a:latin typeface="Arial"/>
+              </a:rPr>
+              <a:t>Show the whole-of-government view where the reuse math exists.</a:t>
+            </a:r>
+          </a:p>
+          <a:p>
+            <a:pPr>
+              <a:spcAft>
+                <a:spcPts val="700"/>
+              </a:spcAft>
+            </a:pPr>
+            <a:r>
+              <a:rPr sz="1600" b="0" i="0">
+                <a:solidFill>
+                  <a:srgbClr val="1A1A1A"/>
+                </a:solidFill>
+                <a:latin typeface="Arial"/>
+              </a:rPr>
+              <a:t>Give a Board the authority to say: not this one, reuse the shared platform.</a:t>
+            </a:r>
+          </a:p>
+        </p:txBody>
+      </p:sp>
+      <p:sp>
+        <p:nvSpPr>
+          <p:cNvPr id="8" name="TextBox 7"/>
           <p:cNvSpPr txBox="1"/>
           <p:nvPr/>
         </p:nvSpPr>
         <p:spPr>
           <a:xfrm>
-            <a:off x="822960" y="822960"/>
-            <a:ext cx="7315200" cy="457200"/>
+            <a:off x="658368" y="5715000"/>
+            <a:ext cx="10881360" cy="548640"/>
           </a:xfrm>
           <a:prstGeom prst="rect">
             <a:avLst/>
@@ -12286,149 +12609,47 @@
           <a:lstStyle/>
           <a:p>
             <a:r>
-              <a:rPr sz="1200" b="1" i="0">
+              <a:rPr sz="1550" b="1" i="0">
+                <a:solidFill>
+                  <a:srgbClr val="006E96"/>
+                </a:solidFill>
+                <a:latin typeface="Arial"/>
+              </a:rPr>
+              <a:t>A rule cannot make reusing another body’s platform cheaper or faster than building fresh — so the project, optimising for its deadline, still builds.</a:t>
+            </a:r>
+          </a:p>
+        </p:txBody>
+      </p:sp>
+      <p:sp>
+        <p:nvSpPr>
+          <p:cNvPr id="9" name="TextBox 8"/>
+          <p:cNvSpPr txBox="1"/>
+          <p:nvPr/>
+        </p:nvSpPr>
+        <p:spPr>
+          <a:xfrm>
+            <a:off x="457200" y="6473952"/>
+            <a:ext cx="7772400" cy="292608"/>
+          </a:xfrm>
+          <a:prstGeom prst="rect">
+            <a:avLst/>
+          </a:prstGeom>
+          <a:noFill/>
+        </p:spPr>
+        <p:txBody>
+          <a:bodyPr wrap="square">
+            <a:spAutoFit/>
+          </a:bodyPr>
+          <a:lstStyle/>
+          <a:p>
+            <a:r>
+              <a:rPr sz="900" b="0" i="0">
                 <a:solidFill>
                   <a:srgbClr val="595959"/>
                 </a:solidFill>
                 <a:latin typeface="Arial"/>
               </a:rPr>
-              <a:t>KP1 · MODULE 2 · VIDEO 2.7</a:t>
-            </a:r>
-          </a:p>
-        </p:txBody>
-      </p:sp>
-      <p:sp>
-        <p:nvSpPr>
-          <p:cNvPr id="3" name="TextBox 2"/>
-          <p:cNvSpPr txBox="1"/>
-          <p:nvPr/>
-        </p:nvSpPr>
-        <p:spPr>
-          <a:xfrm>
-            <a:off x="822960" y="1828800"/>
-            <a:ext cx="2011680" cy="1097280"/>
-          </a:xfrm>
-          <a:prstGeom prst="rect">
-            <a:avLst/>
-          </a:prstGeom>
-          <a:noFill/>
-        </p:spPr>
-        <p:txBody>
-          <a:bodyPr wrap="square">
-            <a:spAutoFit/>
-          </a:bodyPr>
-          <a:lstStyle/>
-          <a:p>
-            <a:r>
-              <a:rPr sz="6000" b="1" i="0">
-                <a:solidFill>
-                  <a:srgbClr val="009CD6"/>
-                </a:solidFill>
-                <a:latin typeface="Arial"/>
-              </a:rPr>
-              <a:t>2.7</a:t>
-            </a:r>
-          </a:p>
-        </p:txBody>
-      </p:sp>
-      <p:sp>
-        <p:nvSpPr>
-          <p:cNvPr id="4" name="TextBox 3"/>
-          <p:cNvSpPr txBox="1"/>
-          <p:nvPr/>
-        </p:nvSpPr>
-        <p:spPr>
-          <a:xfrm>
-            <a:off x="822960" y="2880360"/>
-            <a:ext cx="9601200" cy="1371600"/>
-          </a:xfrm>
-          <a:prstGeom prst="rect">
-            <a:avLst/>
-          </a:prstGeom>
-          <a:noFill/>
-        </p:spPr>
-        <p:txBody>
-          <a:bodyPr wrap="square">
-            <a:spAutoFit/>
-          </a:bodyPr>
-          <a:lstStyle/>
-          <a:p>
-            <a:r>
-              <a:rPr sz="3400" b="1" i="0">
-                <a:solidFill>
-                  <a:srgbClr val="1A1A1A"/>
-                </a:solidFill>
-                <a:latin typeface="Arial"/>
-              </a:rPr>
-              <a:t>The two traps to catch at Assess — bespoke and vendor-driven</a:t>
-            </a:r>
-          </a:p>
-        </p:txBody>
-      </p:sp>
-      <p:sp>
-        <p:nvSpPr>
-          <p:cNvPr id="5" name="TextBox 4"/>
-          <p:cNvSpPr txBox="1"/>
-          <p:nvPr/>
-        </p:nvSpPr>
-        <p:spPr>
-          <a:xfrm>
-            <a:off x="822960" y="4343400"/>
-            <a:ext cx="9875520" cy="1554480"/>
-          </a:xfrm>
-          <a:prstGeom prst="rect">
-            <a:avLst/>
-          </a:prstGeom>
-          <a:noFill/>
-        </p:spPr>
-        <p:txBody>
-          <a:bodyPr wrap="square">
-            <a:spAutoFit/>
-          </a:bodyPr>
-          <a:lstStyle/>
-          <a:p>
-            <a:r>
-              <a:rPr sz="1700" b="0" i="1">
-                <a:solidFill>
-                  <a:srgbClr val="595959"/>
-                </a:solidFill>
-                <a:latin typeface="Arial"/>
-              </a:rPr>
-              <a:t>Two traps recur in every assessment: the bespoke trap, where each project builds its own version of a shared function, and the vendor-driven trap, where a supplier's product quietly becomes the architecture. Learn to spot both at Assess, and you protect the country from paying many times for one thing.</a:t>
-            </a:r>
-          </a:p>
-        </p:txBody>
-      </p:sp>
-      <p:sp>
-        <p:nvSpPr>
-          <p:cNvPr id="6" name="TextBox 5"/>
-          <p:cNvSpPr txBox="1"/>
-          <p:nvPr/>
-        </p:nvSpPr>
-        <p:spPr>
-          <a:xfrm>
-            <a:off x="822960" y="5989320"/>
-            <a:ext cx="7315200" cy="365760"/>
-          </a:xfrm>
-          <a:prstGeom prst="rect">
-            <a:avLst/>
-          </a:prstGeom>
-          <a:noFill/>
-        </p:spPr>
-        <p:txBody>
-          <a:bodyPr wrap="square">
-            <a:spAutoFit/>
-          </a:bodyPr>
-          <a:lstStyle/>
-          <a:p>
-            <a:r>
-              <a:rPr sz="1200" b="0" i="0">
-                <a:solidFill>
-                  <a:srgbClr val="595959"/>
-                </a:solidFill>
-                <a:latin typeface="Arial"/>
-              </a:rPr>
-              <a:t>~4 minutes · standalone video · voice-over on text slides</a:t>
+              <a:t>2.7 · The two traps to catch at Assess</a:t>
             </a:r>
           </a:p>
         </p:txBody>
@@ -12441,7 +12662,7 @@
 </p:sld>
 </file>
 
-<file path=ppt/slides/slide48.xml><?xml version="1.0" encoding="utf-8"?>
+<file path=ppt/slides/slide57.xml><?xml version="1.0" encoding="utf-8"?>
 <p:sld xmlns:a="http://schemas.openxmlformats.org/drawingml/2006/main" xmlns:p="http://schemas.openxmlformats.org/presentationml/2006/main" xmlns:r="http://schemas.openxmlformats.org/officeDocument/2006/relationships">
   <p:cSld>
     <p:spTree>
@@ -12524,81 +12745,24 @@
                 </a:solidFill>
                 <a:latin typeface="Arial"/>
               </a:rPr>
-              <a:t>Trap one — building your own is rational for a project and ruinous for a country</a:t>
-            </a:r>
-          </a:p>
-        </p:txBody>
-      </p:sp>
-      <p:sp>
-        <p:nvSpPr>
-          <p:cNvPr id="4" name="TextBox 3"/>
-          <p:cNvSpPr txBox="1"/>
-          <p:nvPr/>
-        </p:nvSpPr>
-        <p:spPr>
-          <a:xfrm>
-            <a:off x="658368" y="1600200"/>
-            <a:ext cx="10881360" cy="2651760"/>
-          </a:xfrm>
-          <a:prstGeom prst="rect">
-            <a:avLst/>
-          </a:prstGeom>
-          <a:noFill/>
-        </p:spPr>
-        <p:txBody>
-          <a:bodyPr wrap="square">
-            <a:spAutoFit/>
-          </a:bodyPr>
-          <a:lstStyle/>
-          <a:p>
-            <a:pPr>
-              <a:spcAft>
-                <a:spcPts val="1200"/>
-              </a:spcAft>
-            </a:pPr>
-            <a:r>
-              <a:rPr sz="2000" b="0" i="0">
-                <a:solidFill>
-                  <a:srgbClr val="1A1A1A"/>
-                </a:solidFill>
-                <a:latin typeface="Arial"/>
-              </a:rPr>
-              <a:t>A new project needs to identify citizens. Reusing the national platform means learning it, negotiating with the body that owns it, and accepting their timelines. Building its own small identity function is faster — for this project. So it builds its own.</a:t>
-            </a:r>
-          </a:p>
-          <a:p>
-            <a:pPr>
-              <a:spcAft>
-                <a:spcPts val="1200"/>
-              </a:spcAft>
-            </a:pPr>
-            <a:r>
-              <a:rPr sz="2000" b="0" i="0">
-                <a:solidFill>
-                  <a:srgbClr val="1A1A1A"/>
-                </a:solidFill>
-                <a:latin typeface="Arial"/>
-              </a:rPr>
-              <a:t>This is not laziness. Inside the project, building is the rational choice, every time. Multiply it across ten projects and the country has ten identity functions, ten learner lists, ten payment integrations.</a:t>
-            </a:r>
-          </a:p>
-        </p:txBody>
-      </p:sp>
-      <p:sp>
-        <p:nvSpPr>
-          <p:cNvPr id="5" name="Rounded Rectangle 4"/>
+              <a:t>Trap two — a product becomes the architecture one step at a time</a:t>
+            </a:r>
+          </a:p>
+        </p:txBody>
+      </p:sp>
+      <p:sp>
+        <p:nvSpPr>
+          <p:cNvPr id="4" name="Oval 3"/>
           <p:cNvSpPr/>
           <p:nvPr/>
         </p:nvSpPr>
         <p:spPr>
           <a:xfrm>
-            <a:off x="658368" y="4434840"/>
-            <a:ext cx="10881360" cy="1325880"/>
-          </a:xfrm>
-          <a:prstGeom prst="roundRect">
-            <a:avLst>
-              <a:gd name="adj" fmla="val 4500"/>
-            </a:avLst>
+            <a:off x="658368" y="1581912"/>
+            <a:ext cx="310896" cy="310896"/>
+          </a:xfrm>
+          <a:prstGeom prst="ellipse">
+            <a:avLst/>
           </a:prstGeom>
           <a:solidFill>
             <a:srgbClr val="009CD6"/>
@@ -12623,62 +12787,32 @@
           </a:fontRef>
         </p:style>
         <p:txBody>
-          <a:bodyPr rtlCol="0" anchor="ctr"/>
+          <a:bodyPr rtlCol="0" anchor="ctr" lIns="0" rIns="0" tIns="0" bIns="0" wrap="square"/>
           <a:lstStyle/>
           <a:p>
             <a:pPr algn="ctr"/>
-          </a:p>
-        </p:txBody>
-      </p:sp>
-      <p:sp>
-        <p:nvSpPr>
-          <p:cNvPr id="6" name="TextBox 5"/>
-          <p:cNvSpPr txBox="1"/>
-          <p:nvPr/>
-        </p:nvSpPr>
-        <p:spPr>
-          <a:xfrm>
-            <a:off x="859536" y="4626864"/>
-            <a:ext cx="10479024" cy="1051560"/>
-          </a:xfrm>
-          <a:prstGeom prst="rect">
-            <a:avLst/>
-          </a:prstGeom>
-          <a:noFill/>
-        </p:spPr>
-        <p:txBody>
-          <a:bodyPr wrap="square">
-            <a:spAutoFit/>
-          </a:bodyPr>
-          <a:lstStyle/>
-          <a:p>
-            <a:pPr>
-              <a:spcAft>
-                <a:spcPts val="700"/>
-              </a:spcAft>
-            </a:pPr>
-            <a:r>
-              <a:rPr sz="2300" b="1" i="0">
+            <a:r>
+              <a:rPr sz="1300" b="1" i="0">
                 <a:solidFill>
                   <a:srgbClr val="FFFFFF"/>
                 </a:solidFill>
                 <a:latin typeface="Arial"/>
               </a:rPr>
-              <a:t>The country has paid ten times for what it should have built once.</a:t>
-            </a:r>
-          </a:p>
-        </p:txBody>
-      </p:sp>
-      <p:sp>
-        <p:nvSpPr>
-          <p:cNvPr id="7" name="TextBox 6"/>
+              <a:t>1</a:t>
+            </a:r>
+          </a:p>
+        </p:txBody>
+      </p:sp>
+      <p:sp>
+        <p:nvSpPr>
+          <p:cNvPr id="5" name="TextBox 4"/>
           <p:cNvSpPr txBox="1"/>
           <p:nvPr/>
         </p:nvSpPr>
         <p:spPr>
           <a:xfrm>
-            <a:off x="457200" y="6473952"/>
-            <a:ext cx="7772400" cy="292608"/>
+            <a:off x="1152144" y="1508760"/>
+            <a:ext cx="10241280" cy="758952"/>
           </a:xfrm>
           <a:prstGeom prst="rect">
             <a:avLst/>
@@ -12692,51 +12826,33 @@
           <a:lstStyle/>
           <a:p>
             <a:r>
-              <a:rPr sz="900" b="0" i="0">
+              <a:rPr sz="1800" b="0" i="0">
                 <a:solidFill>
-                  <a:srgbClr val="595959"/>
+                  <a:srgbClr val="1A1A1A"/>
                 </a:solidFill>
                 <a:latin typeface="Arial"/>
               </a:rPr>
-              <a:t>2.7 · The two traps to catch at Assess</a:t>
-            </a:r>
-          </a:p>
-        </p:txBody>
-      </p:sp>
-    </p:spTree>
-  </p:cSld>
-  <p:clrMapOvr>
-    <a:masterClrMapping/>
-  </p:clrMapOvr>
-</p:sld>
-</file>
-
-<file path=ppt/slides/slide49.xml><?xml version="1.0" encoding="utf-8"?>
-<p:sld xmlns:a="http://schemas.openxmlformats.org/drawingml/2006/main" xmlns:p="http://schemas.openxmlformats.org/presentationml/2006/main" xmlns:r="http://schemas.openxmlformats.org/officeDocument/2006/relationships">
-  <p:cSld>
-    <p:spTree>
-      <p:nvGrpSpPr>
-        <p:cNvPr id="1" name=""/>
-        <p:cNvGrpSpPr/>
-        <p:nvPr/>
-      </p:nvGrpSpPr>
-      <p:grpSpPr/>
-      <p:sp>
-        <p:nvSpPr>
-          <p:cNvPr id="2" name="Rectangle 1"/>
+              <a:t>A ministry buys a product to solve one problem. The product works.</a:t>
+            </a:r>
+          </a:p>
+        </p:txBody>
+      </p:sp>
+      <p:sp>
+        <p:nvSpPr>
+          <p:cNvPr id="6" name="Rectangle 5"/>
           <p:cNvSpPr/>
           <p:nvPr/>
         </p:nvSpPr>
         <p:spPr>
           <a:xfrm>
-            <a:off x="457200" y="384048"/>
-            <a:ext cx="45720" cy="256032"/>
+            <a:off x="658368" y="2304288"/>
+            <a:ext cx="10881360" cy="12700"/>
           </a:xfrm>
           <a:prstGeom prst="rect">
             <a:avLst/>
           </a:prstGeom>
           <a:solidFill>
-            <a:srgbClr val="009CD6"/>
+            <a:srgbClr val="DDECF4"/>
           </a:solidFill>
           <a:ln>
             <a:noFill/>
@@ -12767,56 +12883,20 @@
       </p:sp>
       <p:sp>
         <p:nvSpPr>
-          <p:cNvPr id="3" name="TextBox 2"/>
-          <p:cNvSpPr txBox="1"/>
+          <p:cNvPr id="7" name="Oval 6"/>
+          <p:cNvSpPr/>
           <p:nvPr/>
         </p:nvSpPr>
         <p:spPr>
           <a:xfrm>
-            <a:off x="621792" y="274320"/>
-            <a:ext cx="11247120" cy="914400"/>
-          </a:xfrm>
-          <a:prstGeom prst="rect">
+            <a:off x="658368" y="2478024"/>
+            <a:ext cx="310896" cy="310896"/>
+          </a:xfrm>
+          <a:prstGeom prst="ellipse">
             <a:avLst/>
           </a:prstGeom>
-          <a:noFill/>
-        </p:spPr>
-        <p:txBody>
-          <a:bodyPr wrap="square">
-            <a:spAutoFit/>
-          </a:bodyPr>
-          <a:lstStyle/>
-          <a:p>
-            <a:r>
-              <a:rPr sz="2800" b="1" i="0">
-                <a:solidFill>
-                  <a:srgbClr val="1A1A1A"/>
-                </a:solidFill>
-                <a:latin typeface="Arial"/>
-              </a:rPr>
-              <a:t>Procurement rules cannot catch it — that is why this is architecture work</a:t>
-            </a:r>
-          </a:p>
-        </p:txBody>
-      </p:sp>
-      <p:sp>
-        <p:nvSpPr>
-          <p:cNvPr id="4" name="Rounded Rectangle 3"/>
-          <p:cNvSpPr/>
-          <p:nvPr/>
-        </p:nvSpPr>
-        <p:spPr>
-          <a:xfrm>
-            <a:off x="658368" y="1554480"/>
-            <a:ext cx="5394960" cy="3977639"/>
-          </a:xfrm>
-          <a:prstGeom prst="roundRect">
-            <a:avLst>
-              <a:gd name="adj" fmla="val 4500"/>
-            </a:avLst>
-          </a:prstGeom>
           <a:solidFill>
-            <a:srgbClr val="E5F5FB"/>
+            <a:srgbClr val="009CD6"/>
           </a:solidFill>
           <a:ln>
             <a:noFill/>
@@ -12838,23 +12918,32 @@
           </a:fontRef>
         </p:style>
         <p:txBody>
-          <a:bodyPr rtlCol="0" anchor="ctr"/>
+          <a:bodyPr rtlCol="0" anchor="ctr" lIns="0" rIns="0" tIns="0" bIns="0" wrap="square"/>
           <a:lstStyle/>
           <a:p>
             <a:pPr algn="ctr"/>
-          </a:p>
-        </p:txBody>
-      </p:sp>
-      <p:sp>
-        <p:nvSpPr>
-          <p:cNvPr id="5" name="TextBox 4"/>
+            <a:r>
+              <a:rPr sz="1300" b="1" i="0">
+                <a:solidFill>
+                  <a:srgbClr val="FFFFFF"/>
+                </a:solidFill>
+                <a:latin typeface="Arial"/>
+              </a:rPr>
+              <a:t>2</a:t>
+            </a:r>
+          </a:p>
+        </p:txBody>
+      </p:sp>
+      <p:sp>
+        <p:nvSpPr>
+          <p:cNvPr id="8" name="TextBox 7"/>
           <p:cNvSpPr txBox="1"/>
           <p:nvPr/>
         </p:nvSpPr>
         <p:spPr>
           <a:xfrm>
-            <a:off x="859536" y="1700784"/>
-            <a:ext cx="4992624" cy="3703320"/>
+            <a:off x="1152144" y="2404872"/>
+            <a:ext cx="10241280" cy="758952"/>
           </a:xfrm>
           <a:prstGeom prst="rect">
             <a:avLst/>
@@ -12867,73 +12956,34 @@
           </a:bodyPr>
           <a:lstStyle/>
           <a:p>
-            <a:pPr>
-              <a:spcAft>
-                <a:spcPts val="700"/>
-              </a:spcAft>
-            </a:pPr>
-            <a:r>
-              <a:rPr sz="1900" b="1" i="0">
-                <a:solidFill>
-                  <a:srgbClr val="006E96"/>
-                </a:solidFill>
-                <a:latin typeface="Arial"/>
-              </a:rPr>
-              <a:t>What a rule can do</a:t>
-            </a:r>
-          </a:p>
-          <a:p>
-            <a:pPr>
-              <a:spcAft>
-                <a:spcPts val="700"/>
-              </a:spcAft>
-            </a:pPr>
-            <a:r>
-              <a:rPr sz="1600" b="0" i="0">
+            <a:r>
+              <a:rPr sz="1800" b="0" i="0">
                 <a:solidFill>
                   <a:srgbClr val="1A1A1A"/>
                 </a:solidFill>
                 <a:latin typeface="Arial"/>
               </a:rPr>
-              <a:t>Require open standards.</a:t>
-            </a:r>
-          </a:p>
-          <a:p>
-            <a:pPr>
-              <a:spcAft>
-                <a:spcPts val="700"/>
-              </a:spcAft>
-            </a:pPr>
-            <a:r>
-              <a:rPr sz="1600" b="0" i="0">
-                <a:solidFill>
-                  <a:srgbClr val="1A1A1A"/>
-                </a:solidFill>
-                <a:latin typeface="Arial"/>
-              </a:rPr>
-              <a:t>Set the intention.</a:t>
-            </a:r>
-          </a:p>
-        </p:txBody>
-      </p:sp>
-      <p:sp>
-        <p:nvSpPr>
-          <p:cNvPr id="6" name="Rounded Rectangle 5"/>
+              <a:t>Slowly, more processes are bent to fit it.</a:t>
+            </a:r>
+          </a:p>
+        </p:txBody>
+      </p:sp>
+      <p:sp>
+        <p:nvSpPr>
+          <p:cNvPr id="9" name="Rectangle 8"/>
           <p:cNvSpPr/>
           <p:nvPr/>
         </p:nvSpPr>
         <p:spPr>
           <a:xfrm>
-            <a:off x="6263640" y="1554480"/>
-            <a:ext cx="5394960" cy="3977639"/>
-          </a:xfrm>
-          <a:prstGeom prst="roundRect">
-            <a:avLst>
-              <a:gd name="adj" fmla="val 4500"/>
-            </a:avLst>
+            <a:off x="658368" y="3200400"/>
+            <a:ext cx="10881360" cy="12700"/>
+          </a:xfrm>
+          <a:prstGeom prst="rect">
+            <a:avLst/>
           </a:prstGeom>
           <a:solidFill>
-            <a:srgbClr val="F2F2F2"/>
+            <a:srgbClr val="DDECF4"/>
           </a:solidFill>
           <a:ln>
             <a:noFill/>
@@ -12964,173 +13014,16 @@
       </p:sp>
       <p:sp>
         <p:nvSpPr>
-          <p:cNvPr id="7" name="TextBox 6"/>
-          <p:cNvSpPr txBox="1"/>
-          <p:nvPr/>
-        </p:nvSpPr>
-        <p:spPr>
-          <a:xfrm>
-            <a:off x="6464808" y="1700784"/>
-            <a:ext cx="4992624" cy="3703320"/>
-          </a:xfrm>
-          <a:prstGeom prst="rect">
-            <a:avLst/>
-          </a:prstGeom>
-          <a:noFill/>
-        </p:spPr>
-        <p:txBody>
-          <a:bodyPr wrap="square">
-            <a:spAutoFit/>
-          </a:bodyPr>
-          <a:lstStyle/>
-          <a:p>
-            <a:pPr>
-              <a:spcAft>
-                <a:spcPts val="700"/>
-              </a:spcAft>
-            </a:pPr>
-            <a:r>
-              <a:rPr sz="1900" b="1" i="0">
-                <a:solidFill>
-                  <a:srgbClr val="006E96"/>
-                </a:solidFill>
-                <a:latin typeface="Arial"/>
-              </a:rPr>
-              <a:t>What only architecture can do</a:t>
-            </a:r>
-          </a:p>
-          <a:p>
-            <a:pPr>
-              <a:spcAft>
-                <a:spcPts val="700"/>
-              </a:spcAft>
-            </a:pPr>
-            <a:r>
-              <a:rPr sz="1600" b="0" i="0">
-                <a:solidFill>
-                  <a:srgbClr val="1A1A1A"/>
-                </a:solidFill>
-                <a:latin typeface="Arial"/>
-              </a:rPr>
-              <a:t>Show the whole-of-government view where the reuse math exists.</a:t>
-            </a:r>
-          </a:p>
-          <a:p>
-            <a:pPr>
-              <a:spcAft>
-                <a:spcPts val="700"/>
-              </a:spcAft>
-            </a:pPr>
-            <a:r>
-              <a:rPr sz="1600" b="0" i="0">
-                <a:solidFill>
-                  <a:srgbClr val="1A1A1A"/>
-                </a:solidFill>
-                <a:latin typeface="Arial"/>
-              </a:rPr>
-              <a:t>Give a Board the authority to say: not this one, reuse the shared platform.</a:t>
-            </a:r>
-          </a:p>
-        </p:txBody>
-      </p:sp>
-      <p:sp>
-        <p:nvSpPr>
-          <p:cNvPr id="8" name="TextBox 7"/>
-          <p:cNvSpPr txBox="1"/>
-          <p:nvPr/>
-        </p:nvSpPr>
-        <p:spPr>
-          <a:xfrm>
-            <a:off x="658368" y="5715000"/>
-            <a:ext cx="10881360" cy="548640"/>
-          </a:xfrm>
-          <a:prstGeom prst="rect">
-            <a:avLst/>
-          </a:prstGeom>
-          <a:noFill/>
-        </p:spPr>
-        <p:txBody>
-          <a:bodyPr wrap="square">
-            <a:spAutoFit/>
-          </a:bodyPr>
-          <a:lstStyle/>
-          <a:p>
-            <a:r>
-              <a:rPr sz="1550" b="1" i="0">
-                <a:solidFill>
-                  <a:srgbClr val="006E96"/>
-                </a:solidFill>
-                <a:latin typeface="Arial"/>
-              </a:rPr>
-              <a:t>A rule cannot make reusing another body’s platform cheaper or faster than building fresh — so the project, optimising for its deadline, still builds.</a:t>
-            </a:r>
-          </a:p>
-        </p:txBody>
-      </p:sp>
-      <p:sp>
-        <p:nvSpPr>
-          <p:cNvPr id="9" name="TextBox 8"/>
-          <p:cNvSpPr txBox="1"/>
-          <p:nvPr/>
-        </p:nvSpPr>
-        <p:spPr>
-          <a:xfrm>
-            <a:off x="457200" y="6473952"/>
-            <a:ext cx="7772400" cy="292608"/>
-          </a:xfrm>
-          <a:prstGeom prst="rect">
-            <a:avLst/>
-          </a:prstGeom>
-          <a:noFill/>
-        </p:spPr>
-        <p:txBody>
-          <a:bodyPr wrap="square">
-            <a:spAutoFit/>
-          </a:bodyPr>
-          <a:lstStyle/>
-          <a:p>
-            <a:r>
-              <a:rPr sz="900" b="0" i="0">
-                <a:solidFill>
-                  <a:srgbClr val="595959"/>
-                </a:solidFill>
-                <a:latin typeface="Arial"/>
-              </a:rPr>
-              <a:t>2.7 · The two traps to catch at Assess</a:t>
-            </a:r>
-          </a:p>
-        </p:txBody>
-      </p:sp>
-    </p:spTree>
-  </p:cSld>
-  <p:clrMapOvr>
-    <a:masterClrMapping/>
-  </p:clrMapOvr>
-</p:sld>
-</file>
-
-<file path=ppt/slides/slide50.xml><?xml version="1.0" encoding="utf-8"?>
-<p:sld xmlns:a="http://schemas.openxmlformats.org/drawingml/2006/main" xmlns:p="http://schemas.openxmlformats.org/presentationml/2006/main" xmlns:r="http://schemas.openxmlformats.org/officeDocument/2006/relationships">
-  <p:cSld>
-    <p:spTree>
-      <p:nvGrpSpPr>
-        <p:cNvPr id="1" name=""/>
-        <p:cNvGrpSpPr/>
-        <p:nvPr/>
-      </p:nvGrpSpPr>
-      <p:grpSpPr/>
-      <p:sp>
-        <p:nvSpPr>
-          <p:cNvPr id="2" name="Rectangle 1"/>
+          <p:cNvPr id="10" name="Oval 9"/>
           <p:cNvSpPr/>
           <p:nvPr/>
         </p:nvSpPr>
         <p:spPr>
           <a:xfrm>
-            <a:off x="457200" y="384048"/>
-            <a:ext cx="45720" cy="256032"/>
-          </a:xfrm>
-          <a:prstGeom prst="rect">
+            <a:off x="658368" y="3374136"/>
+            <a:ext cx="310896" cy="310896"/>
+          </a:xfrm>
+          <a:prstGeom prst="ellipse">
             <a:avLst/>
           </a:prstGeom>
           <a:solidFill>
@@ -13156,23 +13049,32 @@
           </a:fontRef>
         </p:style>
         <p:txBody>
-          <a:bodyPr rtlCol="0" anchor="ctr"/>
+          <a:bodyPr rtlCol="0" anchor="ctr" lIns="0" rIns="0" tIns="0" bIns="0" wrap="square"/>
           <a:lstStyle/>
           <a:p>
             <a:pPr algn="ctr"/>
-          </a:p>
-        </p:txBody>
-      </p:sp>
-      <p:sp>
-        <p:nvSpPr>
-          <p:cNvPr id="3" name="TextBox 2"/>
+            <a:r>
+              <a:rPr sz="1300" b="1" i="0">
+                <a:solidFill>
+                  <a:srgbClr val="FFFFFF"/>
+                </a:solidFill>
+                <a:latin typeface="Arial"/>
+              </a:rPr>
+              <a:t>3</a:t>
+            </a:r>
+          </a:p>
+        </p:txBody>
+      </p:sp>
+      <p:sp>
+        <p:nvSpPr>
+          <p:cNvPr id="11" name="TextBox 10"/>
           <p:cNvSpPr txBox="1"/>
           <p:nvPr/>
         </p:nvSpPr>
         <p:spPr>
           <a:xfrm>
-            <a:off x="621792" y="274320"/>
-            <a:ext cx="11247120" cy="914400"/>
+            <a:off x="1152144" y="3300984"/>
+            <a:ext cx="10241280" cy="758952"/>
           </a:xfrm>
           <a:prstGeom prst="rect">
             <a:avLst/>
@@ -13186,33 +13088,33 @@
           <a:lstStyle/>
           <a:p>
             <a:r>
-              <a:rPr sz="2800" b="1" i="0">
+              <a:rPr sz="1800" b="0" i="0">
                 <a:solidFill>
                   <a:srgbClr val="1A1A1A"/>
                 </a:solidFill>
                 <a:latin typeface="Arial"/>
               </a:rPr>
-              <a:t>Trap two — a product becomes the architecture one step at a time</a:t>
-            </a:r>
-          </a:p>
-        </p:txBody>
-      </p:sp>
-      <p:sp>
-        <p:nvSpPr>
-          <p:cNvPr id="4" name="Oval 3"/>
+              <a:t>Data is stored the way the product wants.</a:t>
+            </a:r>
+          </a:p>
+        </p:txBody>
+      </p:sp>
+      <p:sp>
+        <p:nvSpPr>
+          <p:cNvPr id="12" name="Rectangle 11"/>
           <p:cNvSpPr/>
           <p:nvPr/>
         </p:nvSpPr>
         <p:spPr>
           <a:xfrm>
-            <a:off x="658368" y="1581912"/>
-            <a:ext cx="310896" cy="310896"/>
-          </a:xfrm>
-          <a:prstGeom prst="ellipse">
+            <a:off x="658368" y="4096512"/>
+            <a:ext cx="10881360" cy="12700"/>
+          </a:xfrm>
+          <a:prstGeom prst="rect">
             <a:avLst/>
           </a:prstGeom>
           <a:solidFill>
-            <a:srgbClr val="009CD6"/>
+            <a:srgbClr val="DDECF4"/>
           </a:solidFill>
           <a:ln>
             <a:noFill/>
@@ -13234,72 +13136,29 @@
           </a:fontRef>
         </p:style>
         <p:txBody>
-          <a:bodyPr rtlCol="0" anchor="ctr" lIns="0" rIns="0" tIns="0" bIns="0" wrap="square"/>
+          <a:bodyPr rtlCol="0" anchor="ctr"/>
           <a:lstStyle/>
           <a:p>
             <a:pPr algn="ctr"/>
-            <a:r>
-              <a:rPr sz="1300" b="1" i="0">
-                <a:solidFill>
-                  <a:srgbClr val="FFFFFF"/>
-                </a:solidFill>
-                <a:latin typeface="Arial"/>
-              </a:rPr>
-              <a:t>1</a:t>
-            </a:r>
-          </a:p>
-        </p:txBody>
-      </p:sp>
-      <p:sp>
-        <p:nvSpPr>
-          <p:cNvPr id="5" name="TextBox 4"/>
-          <p:cNvSpPr txBox="1"/>
-          <p:nvPr/>
-        </p:nvSpPr>
-        <p:spPr>
-          <a:xfrm>
-            <a:off x="1152144" y="1508760"/>
-            <a:ext cx="10241280" cy="758952"/>
-          </a:xfrm>
-          <a:prstGeom prst="rect">
-            <a:avLst/>
-          </a:prstGeom>
-          <a:noFill/>
-        </p:spPr>
-        <p:txBody>
-          <a:bodyPr wrap="square">
-            <a:spAutoFit/>
-          </a:bodyPr>
-          <a:lstStyle/>
-          <a:p>
-            <a:r>
-              <a:rPr sz="1800" b="0" i="0">
-                <a:solidFill>
-                  <a:srgbClr val="1A1A1A"/>
-                </a:solidFill>
-                <a:latin typeface="Arial"/>
-              </a:rPr>
-              <a:t>A ministry buys a product to solve one problem. The product works.</a:t>
-            </a:r>
-          </a:p>
-        </p:txBody>
-      </p:sp>
-      <p:sp>
-        <p:nvSpPr>
-          <p:cNvPr id="6" name="Rectangle 5"/>
+          </a:p>
+        </p:txBody>
+      </p:sp>
+      <p:sp>
+        <p:nvSpPr>
+          <p:cNvPr id="13" name="Oval 12"/>
           <p:cNvSpPr/>
           <p:nvPr/>
         </p:nvSpPr>
         <p:spPr>
           <a:xfrm>
-            <a:off x="658368" y="2304288"/>
-            <a:ext cx="10881360" cy="12700"/>
-          </a:xfrm>
-          <a:prstGeom prst="rect">
+            <a:off x="658368" y="4270248"/>
+            <a:ext cx="310896" cy="310896"/>
+          </a:xfrm>
+          <a:prstGeom prst="ellipse">
             <a:avLst/>
           </a:prstGeom>
           <a:solidFill>
-            <a:srgbClr val="DDECF4"/>
+            <a:srgbClr val="009CD6"/>
           </a:solidFill>
           <a:ln>
             <a:noFill/>
@@ -13321,26 +13180,71 @@
           </a:fontRef>
         </p:style>
         <p:txBody>
-          <a:bodyPr rtlCol="0" anchor="ctr"/>
+          <a:bodyPr rtlCol="0" anchor="ctr" lIns="0" rIns="0" tIns="0" bIns="0" wrap="square"/>
           <a:lstStyle/>
           <a:p>
             <a:pPr algn="ctr"/>
-          </a:p>
-        </p:txBody>
-      </p:sp>
-      <p:sp>
-        <p:nvSpPr>
-          <p:cNvPr id="7" name="Oval 6"/>
+            <a:r>
+              <a:rPr sz="1300" b="1" i="0">
+                <a:solidFill>
+                  <a:srgbClr val="FFFFFF"/>
+                </a:solidFill>
+                <a:latin typeface="Arial"/>
+              </a:rPr>
+              <a:t>4</a:t>
+            </a:r>
+          </a:p>
+        </p:txBody>
+      </p:sp>
+      <p:sp>
+        <p:nvSpPr>
+          <p:cNvPr id="14" name="TextBox 13"/>
+          <p:cNvSpPr txBox="1"/>
+          <p:nvPr/>
+        </p:nvSpPr>
+        <p:spPr>
+          <a:xfrm>
+            <a:off x="1152144" y="4197096"/>
+            <a:ext cx="10241280" cy="758952"/>
+          </a:xfrm>
+          <a:prstGeom prst="rect">
+            <a:avLst/>
+          </a:prstGeom>
+          <a:noFill/>
+        </p:spPr>
+        <p:txBody>
+          <a:bodyPr wrap="square">
+            <a:spAutoFit/>
+          </a:bodyPr>
+          <a:lstStyle/>
+          <a:p>
+            <a:r>
+              <a:rPr sz="1800" b="0" i="0">
+                <a:solidFill>
+                  <a:srgbClr val="1A1A1A"/>
+                </a:solidFill>
+                <a:latin typeface="Arial"/>
+              </a:rPr>
+              <a:t>Other systems integrate to the product, not to a standard.</a:t>
+            </a:r>
+          </a:p>
+        </p:txBody>
+      </p:sp>
+      <p:sp>
+        <p:nvSpPr>
+          <p:cNvPr id="15" name="Rounded Rectangle 14"/>
           <p:cNvSpPr/>
           <p:nvPr/>
         </p:nvSpPr>
         <p:spPr>
           <a:xfrm>
-            <a:off x="658368" y="2478024"/>
-            <a:ext cx="310896" cy="310896"/>
-          </a:xfrm>
-          <a:prstGeom prst="ellipse">
-            <a:avLst/>
+            <a:off x="658368" y="5166360"/>
+            <a:ext cx="10881360" cy="1188720"/>
+          </a:xfrm>
+          <a:prstGeom prst="roundRect">
+            <a:avLst>
+              <a:gd name="adj" fmla="val 4500"/>
+            </a:avLst>
           </a:prstGeom>
           <a:solidFill>
             <a:srgbClr val="009CD6"/>
@@ -13365,32 +13269,62 @@
           </a:fontRef>
         </p:style>
         <p:txBody>
-          <a:bodyPr rtlCol="0" anchor="ctr" lIns="0" rIns="0" tIns="0" bIns="0" wrap="square"/>
+          <a:bodyPr rtlCol="0" anchor="ctr"/>
           <a:lstStyle/>
           <a:p>
             <a:pPr algn="ctr"/>
-            <a:r>
-              <a:rPr sz="1300" b="1" i="0">
+          </a:p>
+        </p:txBody>
+      </p:sp>
+      <p:sp>
+        <p:nvSpPr>
+          <p:cNvPr id="16" name="TextBox 15"/>
+          <p:cNvSpPr txBox="1"/>
+          <p:nvPr/>
+        </p:nvSpPr>
+        <p:spPr>
+          <a:xfrm>
+            <a:off x="859536" y="5340096"/>
+            <a:ext cx="10479024" cy="914400"/>
+          </a:xfrm>
+          <a:prstGeom prst="rect">
+            <a:avLst/>
+          </a:prstGeom>
+          <a:noFill/>
+        </p:spPr>
+        <p:txBody>
+          <a:bodyPr wrap="square">
+            <a:spAutoFit/>
+          </a:bodyPr>
+          <a:lstStyle/>
+          <a:p>
+            <a:pPr>
+              <a:spcAft>
+                <a:spcPts val="700"/>
+              </a:spcAft>
+            </a:pPr>
+            <a:r>
+              <a:rPr sz="2100" b="1" i="0">
                 <a:solidFill>
                   <a:srgbClr val="FFFFFF"/>
                 </a:solidFill>
                 <a:latin typeface="Arial"/>
               </a:rPr>
-              <a:t>2</a:t>
-            </a:r>
-          </a:p>
-        </p:txBody>
-      </p:sp>
-      <p:sp>
-        <p:nvSpPr>
-          <p:cNvPr id="8" name="TextBox 7"/>
+              <a:t>Five years on, the product is the architecture — and only the vendor understands it.</a:t>
+            </a:r>
+          </a:p>
+        </p:txBody>
+      </p:sp>
+      <p:sp>
+        <p:nvSpPr>
+          <p:cNvPr id="17" name="TextBox 16"/>
           <p:cNvSpPr txBox="1"/>
           <p:nvPr/>
         </p:nvSpPr>
         <p:spPr>
           <a:xfrm>
-            <a:off x="1152144" y="2404872"/>
-            <a:ext cx="10241280" cy="758952"/>
+            <a:off x="457200" y="6473952"/>
+            <a:ext cx="7772400" cy="292608"/>
           </a:xfrm>
           <a:prstGeom prst="rect">
             <a:avLst/>
@@ -13404,33 +13338,51 @@
           <a:lstStyle/>
           <a:p>
             <a:r>
-              <a:rPr sz="1800" b="0" i="0">
+              <a:rPr sz="900" b="0" i="0">
                 <a:solidFill>
-                  <a:srgbClr val="1A1A1A"/>
+                  <a:srgbClr val="595959"/>
                 </a:solidFill>
                 <a:latin typeface="Arial"/>
               </a:rPr>
-              <a:t>Slowly, more processes are bent to fit it.</a:t>
-            </a:r>
-          </a:p>
-        </p:txBody>
-      </p:sp>
-      <p:sp>
-        <p:nvSpPr>
-          <p:cNvPr id="9" name="Rectangle 8"/>
+              <a:t>2.7 · The two traps to catch at Assess</a:t>
+            </a:r>
+          </a:p>
+        </p:txBody>
+      </p:sp>
+    </p:spTree>
+  </p:cSld>
+  <p:clrMapOvr>
+    <a:masterClrMapping/>
+  </p:clrMapOvr>
+</p:sld>
+</file>
+
+<file path=ppt/slides/slide58.xml><?xml version="1.0" encoding="utf-8"?>
+<p:sld xmlns:a="http://schemas.openxmlformats.org/drawingml/2006/main" xmlns:p="http://schemas.openxmlformats.org/presentationml/2006/main" xmlns:r="http://schemas.openxmlformats.org/officeDocument/2006/relationships">
+  <p:cSld>
+    <p:spTree>
+      <p:nvGrpSpPr>
+        <p:cNvPr id="1" name=""/>
+        <p:cNvGrpSpPr/>
+        <p:nvPr/>
+      </p:nvGrpSpPr>
+      <p:grpSpPr/>
+      <p:sp>
+        <p:nvSpPr>
+          <p:cNvPr id="2" name="Rectangle 1"/>
           <p:cNvSpPr/>
           <p:nvPr/>
         </p:nvSpPr>
         <p:spPr>
           <a:xfrm>
-            <a:off x="658368" y="3200400"/>
-            <a:ext cx="10881360" cy="12700"/>
+            <a:off x="457200" y="384048"/>
+            <a:ext cx="45720" cy="256032"/>
           </a:xfrm>
           <a:prstGeom prst="rect">
             <a:avLst/>
           </a:prstGeom>
           <a:solidFill>
-            <a:srgbClr val="DDECF4"/>
+            <a:srgbClr val="009CD6"/>
           </a:solidFill>
           <a:ln>
             <a:noFill/>
@@ -13461,13 +13413,47 @@
       </p:sp>
       <p:sp>
         <p:nvSpPr>
-          <p:cNvPr id="10" name="Oval 9"/>
+          <p:cNvPr id="3" name="TextBox 2"/>
+          <p:cNvSpPr txBox="1"/>
+          <p:nvPr/>
+        </p:nvSpPr>
+        <p:spPr>
+          <a:xfrm>
+            <a:off x="621792" y="274320"/>
+            <a:ext cx="11247120" cy="914400"/>
+          </a:xfrm>
+          <a:prstGeom prst="rect">
+            <a:avLst/>
+          </a:prstGeom>
+          <a:noFill/>
+        </p:spPr>
+        <p:txBody>
+          <a:bodyPr wrap="square">
+            <a:spAutoFit/>
+          </a:bodyPr>
+          <a:lstStyle/>
+          <a:p>
+            <a:r>
+              <a:rPr sz="2800" b="1" i="0">
+                <a:solidFill>
+                  <a:srgbClr val="1A1A1A"/>
+                </a:solidFill>
+                <a:latin typeface="Arial"/>
+              </a:rPr>
+              <a:t>Four questions catch both — asked at Assess, while both are still cheap to change</a:t>
+            </a:r>
+          </a:p>
+        </p:txBody>
+      </p:sp>
+      <p:sp>
+        <p:nvSpPr>
+          <p:cNvPr id="4" name="Oval 3"/>
           <p:cNvSpPr/>
           <p:nvPr/>
         </p:nvSpPr>
         <p:spPr>
           <a:xfrm>
-            <a:off x="658368" y="3374136"/>
+            <a:off x="621792" y="1463040"/>
             <a:ext cx="310896" cy="310896"/>
           </a:xfrm>
           <a:prstGeom prst="ellipse">
@@ -13507,21 +13493,21 @@
                 </a:solidFill>
                 <a:latin typeface="Arial"/>
               </a:rPr>
-              <a:t>3</a:t>
-            </a:r>
-          </a:p>
-        </p:txBody>
-      </p:sp>
-      <p:sp>
-        <p:nvSpPr>
-          <p:cNvPr id="11" name="TextBox 10"/>
+              <a:t>1</a:t>
+            </a:r>
+          </a:p>
+        </p:txBody>
+      </p:sp>
+      <p:sp>
+        <p:nvSpPr>
+          <p:cNvPr id="5" name="TextBox 4"/>
           <p:cNvSpPr txBox="1"/>
           <p:nvPr/>
         </p:nvSpPr>
         <p:spPr>
           <a:xfrm>
-            <a:off x="1152144" y="3300984"/>
-            <a:ext cx="10241280" cy="758952"/>
+            <a:off x="1115568" y="1417320"/>
+            <a:ext cx="10527487" cy="1165860"/>
           </a:xfrm>
           <a:prstGeom prst="rect">
             <a:avLst/>
@@ -13534,27 +13520,32 @@
           </a:bodyPr>
           <a:lstStyle/>
           <a:p>
-            <a:r>
-              <a:rPr sz="1800" b="0" i="0">
+            <a:pPr>
+              <a:spcAft>
+                <a:spcPts val="300"/>
+              </a:spcAft>
+            </a:pPr>
+            <a:r>
+              <a:rPr sz="1800" b="1" i="0">
                 <a:solidFill>
                   <a:srgbClr val="1A1A1A"/>
                 </a:solidFill>
                 <a:latin typeface="Arial"/>
               </a:rPr>
-              <a:t>Data is stored the way the product wants.</a:t>
-            </a:r>
-          </a:p>
-        </p:txBody>
-      </p:sp>
-      <p:sp>
-        <p:nvSpPr>
-          <p:cNvPr id="12" name="Rectangle 11"/>
+              <a:t>Does a shared building block already exist for this?</a:t>
+            </a:r>
+          </a:p>
+        </p:txBody>
+      </p:sp>
+      <p:sp>
+        <p:nvSpPr>
+          <p:cNvPr id="6" name="Rectangle 5"/>
           <p:cNvSpPr/>
           <p:nvPr/>
         </p:nvSpPr>
         <p:spPr>
           <a:xfrm>
-            <a:off x="658368" y="4096512"/>
+            <a:off x="621792" y="2587752"/>
             <a:ext cx="10881360" cy="12700"/>
           </a:xfrm>
           <a:prstGeom prst="rect">
@@ -13592,13 +13583,13 @@
       </p:sp>
       <p:sp>
         <p:nvSpPr>
-          <p:cNvPr id="13" name="Oval 12"/>
+          <p:cNvPr id="7" name="Oval 6"/>
           <p:cNvSpPr/>
           <p:nvPr/>
         </p:nvSpPr>
         <p:spPr>
           <a:xfrm>
-            <a:off x="658368" y="4270248"/>
+            <a:off x="621792" y="2674620"/>
             <a:ext cx="310896" cy="310896"/>
           </a:xfrm>
           <a:prstGeom prst="ellipse">
@@ -13638,21 +13629,21 @@
                 </a:solidFill>
                 <a:latin typeface="Arial"/>
               </a:rPr>
-              <a:t>4</a:t>
-            </a:r>
-          </a:p>
-        </p:txBody>
-      </p:sp>
-      <p:sp>
-        <p:nvSpPr>
-          <p:cNvPr id="14" name="TextBox 13"/>
+              <a:t>2</a:t>
+            </a:r>
+          </a:p>
+        </p:txBody>
+      </p:sp>
+      <p:sp>
+        <p:nvSpPr>
+          <p:cNvPr id="8" name="TextBox 7"/>
           <p:cNvSpPr txBox="1"/>
           <p:nvPr/>
         </p:nvSpPr>
         <p:spPr>
           <a:xfrm>
-            <a:off x="1152144" y="4197096"/>
-            <a:ext cx="10241280" cy="758952"/>
+            <a:off x="1115568" y="2628900"/>
+            <a:ext cx="10527487" cy="1165860"/>
           </a:xfrm>
           <a:prstGeom prst="rect">
             <a:avLst/>
@@ -13665,36 +13656,39 @@
           </a:bodyPr>
           <a:lstStyle/>
           <a:p>
-            <a:r>
-              <a:rPr sz="1800" b="0" i="0">
+            <a:pPr>
+              <a:spcAft>
+                <a:spcPts val="300"/>
+              </a:spcAft>
+            </a:pPr>
+            <a:r>
+              <a:rPr sz="1800" b="1" i="0">
                 <a:solidFill>
                   <a:srgbClr val="1A1A1A"/>
                 </a:solidFill>
                 <a:latin typeface="Arial"/>
               </a:rPr>
-              <a:t>Other systems integrate to the product, not to a standard.</a:t>
-            </a:r>
-          </a:p>
-        </p:txBody>
-      </p:sp>
-      <p:sp>
-        <p:nvSpPr>
-          <p:cNvPr id="15" name="Rounded Rectangle 14"/>
+              <a:t>Is the data stored to an open standard, or to one vendor's format?</a:t>
+            </a:r>
+          </a:p>
+        </p:txBody>
+      </p:sp>
+      <p:sp>
+        <p:nvSpPr>
+          <p:cNvPr id="9" name="Rectangle 8"/>
           <p:cNvSpPr/>
           <p:nvPr/>
         </p:nvSpPr>
         <p:spPr>
           <a:xfrm>
-            <a:off x="658368" y="5166360"/>
-            <a:ext cx="10881360" cy="1188720"/>
-          </a:xfrm>
-          <a:prstGeom prst="roundRect">
-            <a:avLst>
-              <a:gd name="adj" fmla="val 4500"/>
-            </a:avLst>
+            <a:off x="621792" y="3799332"/>
+            <a:ext cx="10881360" cy="12700"/>
+          </a:xfrm>
+          <a:prstGeom prst="rect">
+            <a:avLst/>
           </a:prstGeom>
           <a:solidFill>
-            <a:srgbClr val="009CD6"/>
+            <a:srgbClr val="DDECF4"/>
           </a:solidFill>
           <a:ln>
             <a:noFill/>
@@ -13725,107 +13719,16 @@
       </p:sp>
       <p:sp>
         <p:nvSpPr>
-          <p:cNvPr id="16" name="TextBox 15"/>
-          <p:cNvSpPr txBox="1"/>
-          <p:nvPr/>
-        </p:nvSpPr>
-        <p:spPr>
-          <a:xfrm>
-            <a:off x="859536" y="5340096"/>
-            <a:ext cx="10479024" cy="914400"/>
-          </a:xfrm>
-          <a:prstGeom prst="rect">
-            <a:avLst/>
-          </a:prstGeom>
-          <a:noFill/>
-        </p:spPr>
-        <p:txBody>
-          <a:bodyPr wrap="square">
-            <a:spAutoFit/>
-          </a:bodyPr>
-          <a:lstStyle/>
-          <a:p>
-            <a:pPr>
-              <a:spcAft>
-                <a:spcPts val="700"/>
-              </a:spcAft>
-            </a:pPr>
-            <a:r>
-              <a:rPr sz="2100" b="1" i="0">
-                <a:solidFill>
-                  <a:srgbClr val="FFFFFF"/>
-                </a:solidFill>
-                <a:latin typeface="Arial"/>
-              </a:rPr>
-              <a:t>Five years on, the product is the architecture — and only the vendor understands it.</a:t>
-            </a:r>
-          </a:p>
-        </p:txBody>
-      </p:sp>
-      <p:sp>
-        <p:nvSpPr>
-          <p:cNvPr id="17" name="TextBox 16"/>
-          <p:cNvSpPr txBox="1"/>
-          <p:nvPr/>
-        </p:nvSpPr>
-        <p:spPr>
-          <a:xfrm>
-            <a:off x="457200" y="6473952"/>
-            <a:ext cx="7772400" cy="292608"/>
-          </a:xfrm>
-          <a:prstGeom prst="rect">
-            <a:avLst/>
-          </a:prstGeom>
-          <a:noFill/>
-        </p:spPr>
-        <p:txBody>
-          <a:bodyPr wrap="square">
-            <a:spAutoFit/>
-          </a:bodyPr>
-          <a:lstStyle/>
-          <a:p>
-            <a:r>
-              <a:rPr sz="900" b="0" i="0">
-                <a:solidFill>
-                  <a:srgbClr val="595959"/>
-                </a:solidFill>
-                <a:latin typeface="Arial"/>
-              </a:rPr>
-              <a:t>2.7 · The two traps to catch at Assess</a:t>
-            </a:r>
-          </a:p>
-        </p:txBody>
-      </p:sp>
-    </p:spTree>
-  </p:cSld>
-  <p:clrMapOvr>
-    <a:masterClrMapping/>
-  </p:clrMapOvr>
-</p:sld>
-</file>
-
-<file path=ppt/slides/slide51.xml><?xml version="1.0" encoding="utf-8"?>
-<p:sld xmlns:a="http://schemas.openxmlformats.org/drawingml/2006/main" xmlns:p="http://schemas.openxmlformats.org/presentationml/2006/main" xmlns:r="http://schemas.openxmlformats.org/officeDocument/2006/relationships">
-  <p:cSld>
-    <p:spTree>
-      <p:nvGrpSpPr>
-        <p:cNvPr id="1" name=""/>
-        <p:cNvGrpSpPr/>
-        <p:nvPr/>
-      </p:nvGrpSpPr>
-      <p:grpSpPr/>
-      <p:sp>
-        <p:nvSpPr>
-          <p:cNvPr id="2" name="Rectangle 1"/>
+          <p:cNvPr id="10" name="Oval 9"/>
           <p:cNvSpPr/>
           <p:nvPr/>
         </p:nvSpPr>
         <p:spPr>
           <a:xfrm>
-            <a:off x="457200" y="384048"/>
-            <a:ext cx="45720" cy="256032"/>
-          </a:xfrm>
-          <a:prstGeom prst="rect">
+            <a:off x="621792" y="3886200"/>
+            <a:ext cx="310896" cy="310896"/>
+          </a:xfrm>
+          <a:prstGeom prst="ellipse">
             <a:avLst/>
           </a:prstGeom>
           <a:solidFill>
@@ -13851,23 +13754,32 @@
           </a:fontRef>
         </p:style>
         <p:txBody>
-          <a:bodyPr rtlCol="0" anchor="ctr"/>
+          <a:bodyPr rtlCol="0" anchor="ctr" lIns="0" rIns="0" tIns="0" bIns="0" wrap="square"/>
           <a:lstStyle/>
           <a:p>
             <a:pPr algn="ctr"/>
-          </a:p>
-        </p:txBody>
-      </p:sp>
-      <p:sp>
-        <p:nvSpPr>
-          <p:cNvPr id="3" name="TextBox 2"/>
+            <a:r>
+              <a:rPr sz="1300" b="1" i="0">
+                <a:solidFill>
+                  <a:srgbClr val="FFFFFF"/>
+                </a:solidFill>
+                <a:latin typeface="Arial"/>
+              </a:rPr>
+              <a:t>3</a:t>
+            </a:r>
+          </a:p>
+        </p:txBody>
+      </p:sp>
+      <p:sp>
+        <p:nvSpPr>
+          <p:cNvPr id="11" name="TextBox 10"/>
           <p:cNvSpPr txBox="1"/>
           <p:nvPr/>
         </p:nvSpPr>
         <p:spPr>
           <a:xfrm>
-            <a:off x="621792" y="274320"/>
-            <a:ext cx="11247120" cy="914400"/>
+            <a:off x="1115568" y="3840480"/>
+            <a:ext cx="10527487" cy="1165860"/>
           </a:xfrm>
           <a:prstGeom prst="rect">
             <a:avLst/>
@@ -13880,34 +13792,39 @@
           </a:bodyPr>
           <a:lstStyle/>
           <a:p>
-            <a:r>
-              <a:rPr sz="2800" b="1" i="0">
+            <a:pPr>
+              <a:spcAft>
+                <a:spcPts val="300"/>
+              </a:spcAft>
+            </a:pPr>
+            <a:r>
+              <a:rPr sz="1800" b="1" i="0">
                 <a:solidFill>
                   <a:srgbClr val="1A1A1A"/>
                 </a:solidFill>
                 <a:latin typeface="Arial"/>
               </a:rPr>
-              <a:t>Four questions catch both — asked at Assess, while both are still cheap to change</a:t>
-            </a:r>
-          </a:p>
-        </p:txBody>
-      </p:sp>
-      <p:sp>
-        <p:nvSpPr>
-          <p:cNvPr id="4" name="Oval 3"/>
+              <a:t>If this supplier doubled their price, could we replace them within two years?</a:t>
+            </a:r>
+          </a:p>
+        </p:txBody>
+      </p:sp>
+      <p:sp>
+        <p:nvSpPr>
+          <p:cNvPr id="12" name="Rectangle 11"/>
           <p:cNvSpPr/>
           <p:nvPr/>
         </p:nvSpPr>
         <p:spPr>
           <a:xfrm>
-            <a:off x="621792" y="1463040"/>
-            <a:ext cx="310896" cy="310896"/>
-          </a:xfrm>
-          <a:prstGeom prst="ellipse">
+            <a:off x="621792" y="5010912"/>
+            <a:ext cx="10881360" cy="12700"/>
+          </a:xfrm>
+          <a:prstGeom prst="rect">
             <a:avLst/>
           </a:prstGeom>
           <a:solidFill>
-            <a:srgbClr val="009CD6"/>
+            <a:srgbClr val="DDECF4"/>
           </a:solidFill>
           <a:ln>
             <a:noFill/>
@@ -13929,77 +13846,29 @@
           </a:fontRef>
         </p:style>
         <p:txBody>
-          <a:bodyPr rtlCol="0" anchor="ctr" lIns="0" rIns="0" tIns="0" bIns="0" wrap="square"/>
+          <a:bodyPr rtlCol="0" anchor="ctr"/>
           <a:lstStyle/>
           <a:p>
             <a:pPr algn="ctr"/>
-            <a:r>
-              <a:rPr sz="1300" b="1" i="0">
-                <a:solidFill>
-                  <a:srgbClr val="FFFFFF"/>
-                </a:solidFill>
-                <a:latin typeface="Arial"/>
-              </a:rPr>
-              <a:t>1</a:t>
-            </a:r>
-          </a:p>
-        </p:txBody>
-      </p:sp>
-      <p:sp>
-        <p:nvSpPr>
-          <p:cNvPr id="5" name="TextBox 4"/>
-          <p:cNvSpPr txBox="1"/>
-          <p:nvPr/>
-        </p:nvSpPr>
-        <p:spPr>
-          <a:xfrm>
-            <a:off x="1115568" y="1417320"/>
-            <a:ext cx="10527487" cy="1165860"/>
-          </a:xfrm>
-          <a:prstGeom prst="rect">
-            <a:avLst/>
-          </a:prstGeom>
-          <a:noFill/>
-        </p:spPr>
-        <p:txBody>
-          <a:bodyPr wrap="square">
-            <a:spAutoFit/>
-          </a:bodyPr>
-          <a:lstStyle/>
-          <a:p>
-            <a:pPr>
-              <a:spcAft>
-                <a:spcPts val="300"/>
-              </a:spcAft>
-            </a:pPr>
-            <a:r>
-              <a:rPr sz="1800" b="1" i="0">
-                <a:solidFill>
-                  <a:srgbClr val="1A1A1A"/>
-                </a:solidFill>
-                <a:latin typeface="Arial"/>
-              </a:rPr>
-              <a:t>Does a shared building block already exist for this?</a:t>
-            </a:r>
-          </a:p>
-        </p:txBody>
-      </p:sp>
-      <p:sp>
-        <p:nvSpPr>
-          <p:cNvPr id="6" name="Rectangle 5"/>
+          </a:p>
+        </p:txBody>
+      </p:sp>
+      <p:sp>
+        <p:nvSpPr>
+          <p:cNvPr id="13" name="Oval 12"/>
           <p:cNvSpPr/>
           <p:nvPr/>
         </p:nvSpPr>
         <p:spPr>
           <a:xfrm>
-            <a:off x="621792" y="2587752"/>
-            <a:ext cx="10881360" cy="12700"/>
-          </a:xfrm>
-          <a:prstGeom prst="rect">
+            <a:off x="621792" y="5097779"/>
+            <a:ext cx="310896" cy="310896"/>
+          </a:xfrm>
+          <a:prstGeom prst="ellipse">
             <a:avLst/>
           </a:prstGeom>
           <a:solidFill>
-            <a:srgbClr val="DDECF4"/>
+            <a:srgbClr val="009CD6"/>
           </a:solidFill>
           <a:ln>
             <a:noFill/>
@@ -14021,32 +13890,204 @@
           </a:fontRef>
         </p:style>
         <p:txBody>
-          <a:bodyPr rtlCol="0" anchor="ctr"/>
+          <a:bodyPr rtlCol="0" anchor="ctr" lIns="0" rIns="0" tIns="0" bIns="0" wrap="square"/>
           <a:lstStyle/>
           <a:p>
             <a:pPr algn="ctr"/>
-          </a:p>
-        </p:txBody>
-      </p:sp>
-      <p:sp>
-        <p:nvSpPr>
-          <p:cNvPr id="7" name="Oval 6"/>
+            <a:r>
+              <a:rPr sz="1300" b="1" i="0">
+                <a:solidFill>
+                  <a:srgbClr val="FFFFFF"/>
+                </a:solidFill>
+                <a:latin typeface="Arial"/>
+              </a:rPr>
+              <a:t>4</a:t>
+            </a:r>
+          </a:p>
+        </p:txBody>
+      </p:sp>
+      <p:sp>
+        <p:nvSpPr>
+          <p:cNvPr id="14" name="TextBox 13"/>
+          <p:cNvSpPr txBox="1"/>
+          <p:nvPr/>
+        </p:nvSpPr>
+        <p:spPr>
+          <a:xfrm>
+            <a:off x="1115568" y="5052059"/>
+            <a:ext cx="10527487" cy="1165860"/>
+          </a:xfrm>
+          <a:prstGeom prst="rect">
+            <a:avLst/>
+          </a:prstGeom>
+          <a:noFill/>
+        </p:spPr>
+        <p:txBody>
+          <a:bodyPr wrap="square">
+            <a:spAutoFit/>
+          </a:bodyPr>
+          <a:lstStyle/>
+          <a:p>
+            <a:pPr>
+              <a:spcAft>
+                <a:spcPts val="300"/>
+              </a:spcAft>
+            </a:pPr>
+            <a:r>
+              <a:rPr sz="1800" b="1" i="0">
+                <a:solidFill>
+                  <a:srgbClr val="1A1A1A"/>
+                </a:solidFill>
+                <a:latin typeface="Arial"/>
+              </a:rPr>
+              <a:t>Is the sourcing choice — build, buy, share, sandbox — deliberate?</a:t>
+            </a:r>
+          </a:p>
+        </p:txBody>
+      </p:sp>
+      <p:sp>
+        <p:nvSpPr>
+          <p:cNvPr id="15" name="TextBox 14"/>
+          <p:cNvSpPr txBox="1"/>
+          <p:nvPr/>
+        </p:nvSpPr>
+        <p:spPr>
+          <a:xfrm>
+            <a:off x="457200" y="6473952"/>
+            <a:ext cx="7772400" cy="292608"/>
+          </a:xfrm>
+          <a:prstGeom prst="rect">
+            <a:avLst/>
+          </a:prstGeom>
+          <a:noFill/>
+        </p:spPr>
+        <p:txBody>
+          <a:bodyPr wrap="square">
+            <a:spAutoFit/>
+          </a:bodyPr>
+          <a:lstStyle/>
+          <a:p>
+            <a:r>
+              <a:rPr sz="900" b="0" i="0">
+                <a:solidFill>
+                  <a:srgbClr val="595959"/>
+                </a:solidFill>
+                <a:latin typeface="Arial"/>
+              </a:rPr>
+              <a:t>2.7 · The two traps to catch at Assess</a:t>
+            </a:r>
+          </a:p>
+        </p:txBody>
+      </p:sp>
+    </p:spTree>
+  </p:cSld>
+  <p:clrMapOvr>
+    <a:masterClrMapping/>
+  </p:clrMapOvr>
+</p:sld>
+</file>
+
+<file path=ppt/slides/slide59.xml><?xml version="1.0" encoding="utf-8"?>
+<p:sld xmlns:a="http://schemas.openxmlformats.org/drawingml/2006/main" xmlns:p="http://schemas.openxmlformats.org/presentationml/2006/main" xmlns:r="http://schemas.openxmlformats.org/officeDocument/2006/relationships">
+  <p:cSld>
+    <p:spTree>
+      <p:nvGrpSpPr>
+        <p:cNvPr id="1" name=""/>
+        <p:cNvGrpSpPr/>
+        <p:nvPr/>
+      </p:nvGrpSpPr>
+      <p:grpSpPr/>
+      <p:sp>
+        <p:nvSpPr>
+          <p:cNvPr id="2" name="TextBox 1"/>
+          <p:cNvSpPr txBox="1"/>
+          <p:nvPr/>
+        </p:nvSpPr>
+        <p:spPr>
+          <a:xfrm>
+            <a:off x="1005840" y="2103120"/>
+            <a:ext cx="10149840" cy="2377440"/>
+          </a:xfrm>
+          <a:prstGeom prst="rect">
+            <a:avLst/>
+          </a:prstGeom>
+          <a:noFill/>
+        </p:spPr>
+        <p:txBody>
+          <a:bodyPr wrap="square">
+            <a:spAutoFit/>
+          </a:bodyPr>
+          <a:lstStyle/>
+          <a:p>
+            <a:r>
+              <a:rPr sz="3000" b="1" i="0">
+                <a:solidFill>
+                  <a:srgbClr val="1A1A1A"/>
+                </a:solidFill>
+                <a:latin typeface="Arial"/>
+              </a:rPr>
+              <a:t>Build-your-own is rational for a project and ruinous for a country; a vendor's product should fit your architecture, not become it — and Assess is where you catch both.</a:t>
+            </a:r>
+          </a:p>
+        </p:txBody>
+      </p:sp>
+      <p:sp>
+        <p:nvSpPr>
+          <p:cNvPr id="3" name="TextBox 2"/>
+          <p:cNvSpPr txBox="1"/>
+          <p:nvPr/>
+        </p:nvSpPr>
+        <p:spPr>
+          <a:xfrm>
+            <a:off x="1005840" y="1554480"/>
+            <a:ext cx="5486400" cy="365760"/>
+          </a:xfrm>
+          <a:prstGeom prst="rect">
+            <a:avLst/>
+          </a:prstGeom>
+          <a:noFill/>
+        </p:spPr>
+        <p:txBody>
+          <a:bodyPr wrap="square">
+            <a:spAutoFit/>
+          </a:bodyPr>
+          <a:lstStyle/>
+          <a:p>
+            <a:r>
+              <a:rPr sz="1200" b="1" i="0">
+                <a:solidFill>
+                  <a:srgbClr val="006E96"/>
+                </a:solidFill>
+                <a:latin typeface="Arial"/>
+              </a:rPr>
+              <a:t>IN ONE SENTENCE</a:t>
+            </a:r>
+          </a:p>
+        </p:txBody>
+      </p:sp>
+      <p:sp>
+        <p:nvSpPr>
+          <p:cNvPr id="4" name="Rounded Rectangle 3"/>
           <p:cNvSpPr/>
           <p:nvPr/>
         </p:nvSpPr>
         <p:spPr>
           <a:xfrm>
-            <a:off x="621792" y="2674620"/>
-            <a:ext cx="310896" cy="310896"/>
-          </a:xfrm>
-          <a:prstGeom prst="ellipse">
-            <a:avLst/>
+            <a:off x="658368" y="4709160"/>
+            <a:ext cx="10881360" cy="1554480"/>
+          </a:xfrm>
+          <a:prstGeom prst="roundRect">
+            <a:avLst>
+              <a:gd name="adj" fmla="val 4500"/>
+            </a:avLst>
           </a:prstGeom>
           <a:solidFill>
-            <a:srgbClr val="009CD6"/>
+            <a:srgbClr val="FFFFFF"/>
           </a:solidFill>
-          <a:ln>
-            <a:noFill/>
+          <a:ln w="9525">
+            <a:solidFill>
+              <a:srgbClr val="009CD6"/>
+            </a:solidFill>
           </a:ln>
           <a:effectLst/>
         </p:spPr>
@@ -14065,49 +14106,25 @@
           </a:fontRef>
         </p:style>
         <p:txBody>
-          <a:bodyPr rtlCol="0" anchor="ctr" lIns="0" rIns="0" tIns="0" bIns="0" wrap="square"/>
+          <a:bodyPr rtlCol="0" anchor="ctr" wrap="square" lIns="228600" rIns="228600" tIns="109728" bIns="109728">
+            <a:noAutofit/>
+          </a:bodyPr>
           <a:lstStyle/>
           <a:p>
-            <a:pPr algn="ctr"/>
-            <a:r>
-              <a:rPr sz="1300" b="1" i="0">
+            <a:pPr algn="l">
+              <a:spcAft>
+                <a:spcPts val="400"/>
+              </a:spcAft>
+            </a:pPr>
+            <a:r>
+              <a:rPr sz="1800" b="1" i="0">
                 <a:solidFill>
-                  <a:srgbClr val="FFFFFF"/>
+                  <a:srgbClr val="006E96"/>
                 </a:solidFill>
                 <a:latin typeface="Arial"/>
               </a:rPr>
-              <a:t>2</a:t>
-            </a:r>
-          </a:p>
-        </p:txBody>
-      </p:sp>
-      <p:sp>
-        <p:nvSpPr>
-          <p:cNvPr id="8" name="TextBox 7"/>
-          <p:cNvSpPr txBox="1"/>
-          <p:nvPr/>
-        </p:nvSpPr>
-        <p:spPr>
-          <a:xfrm>
-            <a:off x="1115568" y="2628900"/>
-            <a:ext cx="10527487" cy="1165860"/>
-          </a:xfrm>
-          <a:prstGeom prst="rect">
-            <a:avLst/>
-          </a:prstGeom>
-          <a:noFill/>
-        </p:spPr>
-        <p:txBody>
-          <a:bodyPr wrap="square">
-            <a:spAutoFit/>
-          </a:bodyPr>
-          <a:lstStyle/>
-          <a:p>
-            <a:pPr>
-              <a:spcAft>
-                <a:spcPts val="300"/>
-              </a:spcAft>
-            </a:pPr>
+              <a:t>Do this on your own sector. </a:t>
+            </a:r>
             <a:r>
               <a:rPr sz="1800" b="1" i="0">
                 <a:solidFill>
@@ -14115,286 +14132,30 @@
                 </a:solidFill>
                 <a:latin typeface="Arial"/>
               </a:rPr>
-              <a:t>Is the data stored to an open standard, or to one vendor's format?</a:t>
-            </a:r>
-          </a:p>
-        </p:txBody>
-      </p:sp>
-      <p:sp>
-        <p:nvSpPr>
-          <p:cNvPr id="9" name="Rectangle 8"/>
-          <p:cNvSpPr/>
-          <p:nvPr/>
-        </p:nvSpPr>
-        <p:spPr>
-          <a:xfrm>
-            <a:off x="621792" y="3799332"/>
-            <a:ext cx="10881360" cy="12700"/>
-          </a:xfrm>
-          <a:prstGeom prst="rect">
-            <a:avLst/>
-          </a:prstGeom>
-          <a:solidFill>
-            <a:srgbClr val="DDECF4"/>
-          </a:solidFill>
-          <a:ln>
-            <a:noFill/>
-          </a:ln>
-          <a:effectLst/>
-        </p:spPr>
-        <p:style>
-          <a:lnRef idx="1">
-            <a:schemeClr val="accent1"/>
-          </a:lnRef>
-          <a:fillRef idx="3">
-            <a:schemeClr val="accent1"/>
-          </a:fillRef>
-          <a:effectRef idx="2">
-            <a:schemeClr val="accent1"/>
-          </a:effectRef>
-          <a:fontRef idx="minor">
-            <a:schemeClr val="lt1"/>
-          </a:fontRef>
-        </p:style>
-        <p:txBody>
-          <a:bodyPr rtlCol="0" anchor="ctr"/>
-          <a:lstStyle/>
-          <a:p>
-            <a:pPr algn="ctr"/>
-          </a:p>
-        </p:txBody>
-      </p:sp>
-      <p:sp>
-        <p:nvSpPr>
-          <p:cNvPr id="10" name="Oval 9"/>
-          <p:cNvSpPr/>
-          <p:nvPr/>
-        </p:nvSpPr>
-        <p:spPr>
-          <a:xfrm>
-            <a:off x="621792" y="3886200"/>
-            <a:ext cx="310896" cy="310896"/>
-          </a:xfrm>
-          <a:prstGeom prst="ellipse">
-            <a:avLst/>
-          </a:prstGeom>
-          <a:solidFill>
-            <a:srgbClr val="009CD6"/>
-          </a:solidFill>
-          <a:ln>
-            <a:noFill/>
-          </a:ln>
-          <a:effectLst/>
-        </p:spPr>
-        <p:style>
-          <a:lnRef idx="1">
-            <a:schemeClr val="accent1"/>
-          </a:lnRef>
-          <a:fillRef idx="3">
-            <a:schemeClr val="accent1"/>
-          </a:fillRef>
-          <a:effectRef idx="2">
-            <a:schemeClr val="accent1"/>
-          </a:effectRef>
-          <a:fontRef idx="minor">
-            <a:schemeClr val="lt1"/>
-          </a:fontRef>
-        </p:style>
-        <p:txBody>
-          <a:bodyPr rtlCol="0" anchor="ctr" lIns="0" rIns="0" tIns="0" bIns="0" wrap="square"/>
-          <a:lstStyle/>
-          <a:p>
-            <a:pPr algn="ctr"/>
-            <a:r>
-              <a:rPr sz="1300" b="1" i="0">
+              <a:t>Run a two-trap screen on a project proposal.</a:t>
+            </a:r>
+          </a:p>
+          <a:p>
+            <a:pPr algn="l">
+              <a:spcAft>
+                <a:spcPts val="400"/>
+              </a:spcAft>
+            </a:pPr>
+            <a:r>
+              <a:rPr sz="1800" b="0" i="0">
                 <a:solidFill>
-                  <a:srgbClr val="FFFFFF"/>
+                  <a:srgbClr val="595959"/>
                 </a:solidFill>
                 <a:latin typeface="Arial"/>
               </a:rPr>
-              <a:t>3</a:t>
-            </a:r>
-          </a:p>
-        </p:txBody>
-      </p:sp>
-      <p:sp>
-        <p:nvSpPr>
-          <p:cNvPr id="11" name="TextBox 10"/>
-          <p:cNvSpPr txBox="1"/>
-          <p:nvPr/>
-        </p:nvSpPr>
-        <p:spPr>
-          <a:xfrm>
-            <a:off x="1115568" y="3840480"/>
-            <a:ext cx="10527487" cy="1165860"/>
-          </a:xfrm>
-          <a:prstGeom prst="rect">
-            <a:avLst/>
-          </a:prstGeom>
-          <a:noFill/>
-        </p:spPr>
-        <p:txBody>
-          <a:bodyPr wrap="square">
-            <a:spAutoFit/>
-          </a:bodyPr>
-          <a:lstStyle/>
-          <a:p>
-            <a:pPr>
-              <a:spcAft>
-                <a:spcPts val="300"/>
-              </a:spcAft>
-            </a:pPr>
-            <a:r>
-              <a:rPr sz="1800" b="1" i="0">
-                <a:solidFill>
-                  <a:srgbClr val="1A1A1A"/>
-                </a:solidFill>
-                <a:latin typeface="Arial"/>
-              </a:rPr>
-              <a:t>If this supplier doubled their price, could we replace them within two years?</a:t>
-            </a:r>
-          </a:p>
-        </p:txBody>
-      </p:sp>
-      <p:sp>
-        <p:nvSpPr>
-          <p:cNvPr id="12" name="Rectangle 11"/>
-          <p:cNvSpPr/>
-          <p:nvPr/>
-        </p:nvSpPr>
-        <p:spPr>
-          <a:xfrm>
-            <a:off x="621792" y="5010912"/>
-            <a:ext cx="10881360" cy="12700"/>
-          </a:xfrm>
-          <a:prstGeom prst="rect">
-            <a:avLst/>
-          </a:prstGeom>
-          <a:solidFill>
-            <a:srgbClr val="DDECF4"/>
-          </a:solidFill>
-          <a:ln>
-            <a:noFill/>
-          </a:ln>
-          <a:effectLst/>
-        </p:spPr>
-        <p:style>
-          <a:lnRef idx="1">
-            <a:schemeClr val="accent1"/>
-          </a:lnRef>
-          <a:fillRef idx="3">
-            <a:schemeClr val="accent1"/>
-          </a:fillRef>
-          <a:effectRef idx="2">
-            <a:schemeClr val="accent1"/>
-          </a:effectRef>
-          <a:fontRef idx="minor">
-            <a:schemeClr val="lt1"/>
-          </a:fontRef>
-        </p:style>
-        <p:txBody>
-          <a:bodyPr rtlCol="0" anchor="ctr"/>
-          <a:lstStyle/>
-          <a:p>
-            <a:pPr algn="ctr"/>
-          </a:p>
-        </p:txBody>
-      </p:sp>
-      <p:sp>
-        <p:nvSpPr>
-          <p:cNvPr id="13" name="Oval 12"/>
-          <p:cNvSpPr/>
-          <p:nvPr/>
-        </p:nvSpPr>
-        <p:spPr>
-          <a:xfrm>
-            <a:off x="621792" y="5097779"/>
-            <a:ext cx="310896" cy="310896"/>
-          </a:xfrm>
-          <a:prstGeom prst="ellipse">
-            <a:avLst/>
-          </a:prstGeom>
-          <a:solidFill>
-            <a:srgbClr val="009CD6"/>
-          </a:solidFill>
-          <a:ln>
-            <a:noFill/>
-          </a:ln>
-          <a:effectLst/>
-        </p:spPr>
-        <p:style>
-          <a:lnRef idx="1">
-            <a:schemeClr val="accent1"/>
-          </a:lnRef>
-          <a:fillRef idx="3">
-            <a:schemeClr val="accent1"/>
-          </a:fillRef>
-          <a:effectRef idx="2">
-            <a:schemeClr val="accent1"/>
-          </a:effectRef>
-          <a:fontRef idx="minor">
-            <a:schemeClr val="lt1"/>
-          </a:fontRef>
-        </p:style>
-        <p:txBody>
-          <a:bodyPr rtlCol="0" anchor="ctr" lIns="0" rIns="0" tIns="0" bIns="0" wrap="square"/>
-          <a:lstStyle/>
-          <a:p>
-            <a:pPr algn="ctr"/>
-            <a:r>
-              <a:rPr sz="1300" b="1" i="0">
-                <a:solidFill>
-                  <a:srgbClr val="FFFFFF"/>
-                </a:solidFill>
-                <a:latin typeface="Arial"/>
-              </a:rPr>
-              <a:t>4</a:t>
-            </a:r>
-          </a:p>
-        </p:txBody>
-      </p:sp>
-      <p:sp>
-        <p:nvSpPr>
-          <p:cNvPr id="14" name="TextBox 13"/>
-          <p:cNvSpPr txBox="1"/>
-          <p:nvPr/>
-        </p:nvSpPr>
-        <p:spPr>
-          <a:xfrm>
-            <a:off x="1115568" y="5052059"/>
-            <a:ext cx="10527487" cy="1165860"/>
-          </a:xfrm>
-          <a:prstGeom prst="rect">
-            <a:avLst/>
-          </a:prstGeom>
-          <a:noFill/>
-        </p:spPr>
-        <p:txBody>
-          <a:bodyPr wrap="square">
-            <a:spAutoFit/>
-          </a:bodyPr>
-          <a:lstStyle/>
-          <a:p>
-            <a:pPr>
-              <a:spcAft>
-                <a:spcPts val="300"/>
-              </a:spcAft>
-            </a:pPr>
-            <a:r>
-              <a:rPr sz="1800" b="1" i="0">
-                <a:solidFill>
-                  <a:srgbClr val="1A1A1A"/>
-                </a:solidFill>
-                <a:latin typeface="Arial"/>
-              </a:rPr>
-              <a:t>Is the sourcing choice — build, buy, share, sandbox — deliberate?</a:t>
-            </a:r>
-          </a:p>
-        </p:txBody>
-      </p:sp>
-      <p:sp>
-        <p:nvSpPr>
-          <p:cNvPr id="15" name="TextBox 14"/>
+              <a:t>The prompt in the companion material gives you a two-trap screen, questions for the project team, and a recommended sourcing posture. Before the next video.</a:t>
+            </a:r>
+          </a:p>
+        </p:txBody>
+      </p:sp>
+      <p:sp>
+        <p:nvSpPr>
+          <p:cNvPr id="5" name="TextBox 4"/>
           <p:cNvSpPr txBox="1"/>
           <p:nvPr/>
         </p:nvSpPr>
@@ -14422,6 +14183,41 @@
                 <a:latin typeface="Arial"/>
               </a:rPr>
               <a:t>2.7 · The two traps to catch at Assess</a:t>
+            </a:r>
+          </a:p>
+        </p:txBody>
+      </p:sp>
+      <p:sp>
+        <p:nvSpPr>
+          <p:cNvPr id="6" name="TextBox 5"/>
+          <p:cNvSpPr txBox="1"/>
+          <p:nvPr/>
+        </p:nvSpPr>
+        <p:spPr>
+          <a:xfrm>
+            <a:off x="10058400" y="6473952"/>
+            <a:ext cx="1673352" cy="292608"/>
+          </a:xfrm>
+          <a:prstGeom prst="rect">
+            <a:avLst/>
+          </a:prstGeom>
+          <a:noFill/>
+        </p:spPr>
+        <p:txBody>
+          <a:bodyPr wrap="square">
+            <a:spAutoFit/>
+          </a:bodyPr>
+          <a:lstStyle/>
+          <a:p>
+            <a:pPr algn="r"/>
+            <a:r>
+              <a:rPr sz="900" b="0" i="0">
+                <a:solidFill>
+                  <a:srgbClr val="595959"/>
+                </a:solidFill>
+                <a:latin typeface="Arial"/>
+              </a:rPr>
+              <a:t>www.itu.int</a:t>
             </a:r>
           </a:p>
         </p:txBody>
@@ -14434,250 +14230,7 @@
 </p:sld>
 </file>
 
-<file path=ppt/slides/slide52.xml><?xml version="1.0" encoding="utf-8"?>
-<p:sld xmlns:a="http://schemas.openxmlformats.org/drawingml/2006/main" xmlns:p="http://schemas.openxmlformats.org/presentationml/2006/main" xmlns:r="http://schemas.openxmlformats.org/officeDocument/2006/relationships">
-  <p:cSld>
-    <p:spTree>
-      <p:nvGrpSpPr>
-        <p:cNvPr id="1" name=""/>
-        <p:cNvGrpSpPr/>
-        <p:nvPr/>
-      </p:nvGrpSpPr>
-      <p:grpSpPr/>
-      <p:sp>
-        <p:nvSpPr>
-          <p:cNvPr id="2" name="TextBox 1"/>
-          <p:cNvSpPr txBox="1"/>
-          <p:nvPr/>
-        </p:nvSpPr>
-        <p:spPr>
-          <a:xfrm>
-            <a:off x="1005840" y="2103120"/>
-            <a:ext cx="10149840" cy="2377440"/>
-          </a:xfrm>
-          <a:prstGeom prst="rect">
-            <a:avLst/>
-          </a:prstGeom>
-          <a:noFill/>
-        </p:spPr>
-        <p:txBody>
-          <a:bodyPr wrap="square">
-            <a:spAutoFit/>
-          </a:bodyPr>
-          <a:lstStyle/>
-          <a:p>
-            <a:r>
-              <a:rPr sz="3000" b="1" i="0">
-                <a:solidFill>
-                  <a:srgbClr val="1A1A1A"/>
-                </a:solidFill>
-                <a:latin typeface="Arial"/>
-              </a:rPr>
-              <a:t>Build-your-own is rational for a project and ruinous for a country; a vendor's product should fit your architecture, not become it — and Assess is where you catch both.</a:t>
-            </a:r>
-          </a:p>
-        </p:txBody>
-      </p:sp>
-      <p:sp>
-        <p:nvSpPr>
-          <p:cNvPr id="3" name="TextBox 2"/>
-          <p:cNvSpPr txBox="1"/>
-          <p:nvPr/>
-        </p:nvSpPr>
-        <p:spPr>
-          <a:xfrm>
-            <a:off x="1005840" y="1554480"/>
-            <a:ext cx="5486400" cy="365760"/>
-          </a:xfrm>
-          <a:prstGeom prst="rect">
-            <a:avLst/>
-          </a:prstGeom>
-          <a:noFill/>
-        </p:spPr>
-        <p:txBody>
-          <a:bodyPr wrap="square">
-            <a:spAutoFit/>
-          </a:bodyPr>
-          <a:lstStyle/>
-          <a:p>
-            <a:r>
-              <a:rPr sz="1200" b="1" i="0">
-                <a:solidFill>
-                  <a:srgbClr val="006E96"/>
-                </a:solidFill>
-                <a:latin typeface="Arial"/>
-              </a:rPr>
-              <a:t>IN ONE SENTENCE</a:t>
-            </a:r>
-          </a:p>
-        </p:txBody>
-      </p:sp>
-      <p:sp>
-        <p:nvSpPr>
-          <p:cNvPr id="4" name="Rounded Rectangle 3"/>
-          <p:cNvSpPr/>
-          <p:nvPr/>
-        </p:nvSpPr>
-        <p:spPr>
-          <a:xfrm>
-            <a:off x="658368" y="4709160"/>
-            <a:ext cx="10881360" cy="1554480"/>
-          </a:xfrm>
-          <a:prstGeom prst="roundRect">
-            <a:avLst>
-              <a:gd name="adj" fmla="val 4500"/>
-            </a:avLst>
-          </a:prstGeom>
-          <a:solidFill>
-            <a:srgbClr val="FFFFFF"/>
-          </a:solidFill>
-          <a:ln w="9525">
-            <a:solidFill>
-              <a:srgbClr val="009CD6"/>
-            </a:solidFill>
-          </a:ln>
-          <a:effectLst/>
-        </p:spPr>
-        <p:style>
-          <a:lnRef idx="1">
-            <a:schemeClr val="accent1"/>
-          </a:lnRef>
-          <a:fillRef idx="3">
-            <a:schemeClr val="accent1"/>
-          </a:fillRef>
-          <a:effectRef idx="2">
-            <a:schemeClr val="accent1"/>
-          </a:effectRef>
-          <a:fontRef idx="minor">
-            <a:schemeClr val="lt1"/>
-          </a:fontRef>
-        </p:style>
-        <p:txBody>
-          <a:bodyPr rtlCol="0" anchor="ctr" wrap="square" lIns="228600" rIns="228600" tIns="109728" bIns="109728">
-            <a:noAutofit/>
-          </a:bodyPr>
-          <a:lstStyle/>
-          <a:p>
-            <a:pPr algn="l">
-              <a:spcAft>
-                <a:spcPts val="400"/>
-              </a:spcAft>
-            </a:pPr>
-            <a:r>
-              <a:rPr sz="1800" b="1" i="0">
-                <a:solidFill>
-                  <a:srgbClr val="006E96"/>
-                </a:solidFill>
-                <a:latin typeface="Arial"/>
-              </a:rPr>
-              <a:t>Do this on your own sector. </a:t>
-            </a:r>
-            <a:r>
-              <a:rPr sz="1800" b="1" i="0">
-                <a:solidFill>
-                  <a:srgbClr val="1A1A1A"/>
-                </a:solidFill>
-                <a:latin typeface="Arial"/>
-              </a:rPr>
-              <a:t>Run a two-trap screen on a project proposal.</a:t>
-            </a:r>
-          </a:p>
-          <a:p>
-            <a:pPr algn="l">
-              <a:spcAft>
-                <a:spcPts val="400"/>
-              </a:spcAft>
-            </a:pPr>
-            <a:r>
-              <a:rPr sz="1800" b="0" i="0">
-                <a:solidFill>
-                  <a:srgbClr val="595959"/>
-                </a:solidFill>
-                <a:latin typeface="Arial"/>
-              </a:rPr>
-              <a:t>The prompt in the companion material gives you a two-trap screen, questions for the project team, and a recommended sourcing posture. Before the next video.</a:t>
-            </a:r>
-          </a:p>
-        </p:txBody>
-      </p:sp>
-      <p:sp>
-        <p:nvSpPr>
-          <p:cNvPr id="5" name="TextBox 4"/>
-          <p:cNvSpPr txBox="1"/>
-          <p:nvPr/>
-        </p:nvSpPr>
-        <p:spPr>
-          <a:xfrm>
-            <a:off x="457200" y="6473952"/>
-            <a:ext cx="7772400" cy="292608"/>
-          </a:xfrm>
-          <a:prstGeom prst="rect">
-            <a:avLst/>
-          </a:prstGeom>
-          <a:noFill/>
-        </p:spPr>
-        <p:txBody>
-          <a:bodyPr wrap="square">
-            <a:spAutoFit/>
-          </a:bodyPr>
-          <a:lstStyle/>
-          <a:p>
-            <a:r>
-              <a:rPr sz="900" b="0" i="0">
-                <a:solidFill>
-                  <a:srgbClr val="595959"/>
-                </a:solidFill>
-                <a:latin typeface="Arial"/>
-              </a:rPr>
-              <a:t>2.7 · The two traps to catch at Assess</a:t>
-            </a:r>
-          </a:p>
-        </p:txBody>
-      </p:sp>
-      <p:sp>
-        <p:nvSpPr>
-          <p:cNvPr id="6" name="TextBox 5"/>
-          <p:cNvSpPr txBox="1"/>
-          <p:nvPr/>
-        </p:nvSpPr>
-        <p:spPr>
-          <a:xfrm>
-            <a:off x="10058400" y="6473952"/>
-            <a:ext cx="1673352" cy="292608"/>
-          </a:xfrm>
-          <a:prstGeom prst="rect">
-            <a:avLst/>
-          </a:prstGeom>
-          <a:noFill/>
-        </p:spPr>
-        <p:txBody>
-          <a:bodyPr wrap="square">
-            <a:spAutoFit/>
-          </a:bodyPr>
-          <a:lstStyle/>
-          <a:p>
-            <a:pPr algn="r"/>
-            <a:r>
-              <a:rPr sz="900" b="0" i="0">
-                <a:solidFill>
-                  <a:srgbClr val="595959"/>
-                </a:solidFill>
-                <a:latin typeface="Arial"/>
-              </a:rPr>
-              <a:t>www.itu.int</a:t>
-            </a:r>
-          </a:p>
-        </p:txBody>
-      </p:sp>
-    </p:spTree>
-  </p:cSld>
-  <p:clrMapOvr>
-    <a:masterClrMapping/>
-  </p:clrMapOvr>
-</p:sld>
-</file>
-
-<file path=ppt/slides/slide53.xml><?xml version="1.0" encoding="utf-8"?>
+<file path=ppt/slides/slide60.xml><?xml version="1.0" encoding="utf-8"?>
 <p:sld xmlns:a="http://schemas.openxmlformats.org/drawingml/2006/main" xmlns:p="http://schemas.openxmlformats.org/presentationml/2006/main" xmlns:r="http://schemas.openxmlformats.org/officeDocument/2006/relationships">
   <p:cSld>
     <p:spTree>

--- a/10-Knowledge-Products/KP1-GEA/videos/module_2/en/decks/KP1_M2_2.7_Deck_v0.2.pptx
+++ b/10-Knowledge-Products/KP1-GEA/videos/module_2/en/decks/KP1_M2_2.7_Deck_v0.2.pptx
@@ -11771,7 +11771,7 @@
                 </a:solidFill>
                 <a:latin typeface="Arial"/>
               </a:rPr>
-              <a:t>~4 minutes · standalone video · voice-over on text slides</a:t>
+              <a:t>standalone video · voice-over on text slides</a:t>
             </a:r>
           </a:p>
         </p:txBody>

--- a/10-Knowledge-Products/KP1-GEA/videos/module_2/en/decks/KP1_M2_2.7_Deck_v0.2.pptx
+++ b/10-Knowledge-Products/KP1-GEA/videos/module_2/en/decks/KP1_M2_2.7_Deck_v0.2.pptx
@@ -11635,7 +11635,7 @@
                 </a:solidFill>
                 <a:latin typeface="Arial"/>
               </a:rPr>
-              <a:t>KP1 · MODULE 2 · VIDEO 2.7</a:t>
+              <a:t>MODULE 2 · VIDEO 2.7</a:t>
             </a:r>
           </a:p>
         </p:txBody>
